--- a/presentations/harness-agent-one-fr.pptx
+++ b/presentations/harness-agent-one-fr.pptx
@@ -27,9 +27,10 @@
     <p:sldId id="275" r:id="rId21"/>
     <p:sldId id="276" r:id="rId22"/>
     <p:sldId id="277" r:id="rId23"/>
+    <p:sldId id="278" r:id="rId24"/>
   </p:sldIdLst>
   <p:notesMasterIdLst>
-    <p:notesMasterId r:id="rId24"/>
+    <p:notesMasterId r:id="rId25"/>
   </p:notesMasterIdLst>
   <p:sldSz cx="12192000" cy="6858000"/>
   <p:notesSz cx="6858000" cy="12192000"/>
@@ -1579,7 +1580,7 @@
           <a:p>
             <a:r>
               <a:rPr lang="en-US" dirty="0"/>
-              <a:t>La configuration en entreprise. Elle est en YAML, par couches — globale, projet, locale, environnement, options — et peut être découpée en un fichier par partie, pour que chaque équipe possède le sien. Le registre dit d'où viennent les choses : les modèles servis par la gateway, les outils que l'agent peut trouver, notre Artifactory privé pour npm, pip et Go — appliqué à chaque commande de l'agent et dans le conteneur — et le registre privé d'où vient l'image du conteneur. Les secrets ne sont jamais que nommés : la configuration contient le nom de la variable, jamais la clé. Et une commande montre chaque valeur avec le fichier et la ligne d'où elle vient.</a:t>
+              <a:t>Et le harness mesure et soigne désormais sa propre équipe. Chaque exécution entre dans un registre de valeur — réussite, échec ou neutre — et chaque rang est noté sur son propre travail : un zone worker sur les changements qui aboutissent, un domain owner sur des verdicts qui tiennent, un coordinateur sur les plans qui aboutissent — affiché en jauges dans le terminal et le tableau de bord. Quand les exécutions d'un agent échouent encore et encore, sa tension monte : à cinq, son responsable doit répondre — réécrire la consigne, découper le travail ou escalader ; après trois réponses, cela remonte jusqu'à vous ; à sept, la zone elle-même est découpée ou retirée. Un agent sous tension dont les notes débordent évolue — scission, mutation ou renaissance — préparé et prouvé avant d'être appliqué. Et la forge transforme ce qu'une exécution a prouvé en skill, que vous approuvez.</a:t>
             </a:r>
             <a:endParaRPr lang="en-US" dirty="0"/>
           </a:p>
@@ -1667,7 +1668,7 @@
           <a:p>
             <a:r>
               <a:rPr lang="en-US" dirty="0"/>
-              <a:t>La démo, sur nos propres modèles. Agent-One parle à notre gateway, devant vLLM qui sert trois modèles : muse-glimmer, rapide, lit ; glm-5-3 valide ; kimi-k3, le plus fort, écrit et pilote la session — chacun avec un repli d'une autre famille. Cinq étapes : status montre chaque modèle résolu depuis la configuration, avec son fichier. Puis une vraie tâche : on regarde la réflexion et les cartes d'outils. Un sous-agent prend une partie — ctrl+t pour le suivre. À la fin, le propriétaire du domaine valide et le verdict est consigné. Enfin, je lui demande de supprimer le répertoire home : le guard refuse, avant même de me demander.</a:t>
+              <a:t>La configuration en entreprise. Elle est en YAML, par couches — globale, projet, locale, environnement, options — et peut être découpée en un fichier par partie, pour que chaque équipe possède le sien. Le registre dit d'où viennent les choses : les modèles servis par la gateway, les outils que l'agent peut trouver, notre Artifactory privé pour npm, pip et Go — chacun s'y authentifie comme il lit un identifiant, et avec la politique private-only toute commande qui va chercher des paquets ailleurs est refusée — et l'image du conteneur. Les secrets ne sont jamais que nommés : la configuration contient le nom de la variable, jamais la clé. Et une commande montre chaque valeur avec le fichier et la ligne d'où elle vient.</a:t>
             </a:r>
             <a:endParaRPr lang="en-US" dirty="0"/>
           </a:p>
@@ -1755,7 +1756,7 @@
           <a:p>
             <a:r>
               <a:rPr lang="en-US" dirty="0"/>
-              <a:t>Trois idées à retenir. Un : la fiabilité vient du harness, pas seulement du modèle — le même modèle fait un travail très différent selon le harness. Deux : les règles importantes doivent être appliquées dans le code ; une règle dans un prompt est un vœu. Trois : l'étape suivante, ce sont des harness qui apprennent de leurs exécutions — mémoire, skills, vérificateurs — et cela ne marche que si le harness ne peut pas tricher avec ses propres contrôles. Agent-One, c'est là que nous mettons ces idées en œuvre, sur nos propres modèles. Merci — vos questions.</a:t>
+              <a:t>La démo, sur nos propres modèles. Agent-One parle à notre gateway, devant vLLM qui sert trois modèles : muse-glimmer, rapide, lit ; glm-5-3 valide ; kimi-k3, le plus fort, écrit et pilote la session — chacun avec un repli d'une autre famille. Cinq étapes : status montre chaque modèle résolu depuis la configuration, avec son fichier. Puis une vraie tâche : on regarde la réflexion et les cartes d'outils. Un sous-agent prend une partie — ctrl+t pour le suivre. À la fin, le propriétaire du domaine valide et le verdict est consigné. Enfin, je lui demande de supprimer le répertoire home : le guard refuse, avant même de me demander.</a:t>
             </a:r>
             <a:endParaRPr lang="en-US" dirty="0"/>
           </a:p>
@@ -1779,6 +1780,94 @@
             <a:fld id="{F7021451-1387-4CA6-816F-3879F97B5CBC}" type="slidenum">
               <a:rPr lang="en-US"/>
               <a:t>22</a:t>
+            </a:fld>
+            <a:endParaRPr lang="en-US"/>
+          </a:p>
+        </p:txBody>
+      </p:sp>
+    </p:spTree>
+    <p:extLst>
+      <p:ext uri="{BB962C8B-B14F-4D97-AF65-F5344CB8AC3E}">
+        <p14:creationId xmlns:p14="http://schemas.microsoft.com/office/powerpoint/2010/main" val="1024086991"/>
+      </p:ext>
+    </p:extLst>
+  </p:cSld>
+  <p:clrMapOvr>
+    <a:masterClrMapping/>
+  </p:clrMapOvr>
+</p:notes>
+</file>
+
+<file path=ppt/notesSlides/notesSlide23.xml><?xml version="1.0" encoding="utf-8"?>
+<p:notes xmlns:a="http://schemas.openxmlformats.org/drawingml/2006/main" xmlns:r="http://schemas.openxmlformats.org/officeDocument/2006/relationships" xmlns:p="http://schemas.openxmlformats.org/presentationml/2006/main">
+  <p:cSld>
+    <p:spTree>
+      <p:nvGrpSpPr>
+        <p:cNvPr id="1" name=""/>
+        <p:cNvGrpSpPr/>
+        <p:nvPr/>
+      </p:nvGrpSpPr>
+      <p:grpSpPr>
+        <a:xfrm>
+          <a:off x="0" y="0"/>
+          <a:ext cx="0" cy="0"/>
+          <a:chOff x="0" y="0"/>
+          <a:chExt cx="0" cy="0"/>
+        </a:xfrm>
+      </p:grpSpPr>
+      <p:sp>
+        <p:nvSpPr>
+          <p:cNvPr id="2" name="Slide Image Placeholder 1"/>
+          <p:cNvSpPr>
+            <a:spLocks noGrp="1" noRot="1" noChangeAspect="1"/>
+          </p:cNvSpPr>
+          <p:nvPr>
+            <p:ph type="sldImg"/>
+          </p:nvPr>
+        </p:nvSpPr>
+        <p:spPr/>
+      </p:sp>
+      <p:sp>
+        <p:nvSpPr>
+          <p:cNvPr id="3" name="Notes Placeholder 2"/>
+          <p:cNvSpPr>
+            <a:spLocks noGrp="1"/>
+          </p:cNvSpPr>
+          <p:nvPr>
+            <p:ph type="body" idx="1"/>
+          </p:nvPr>
+        </p:nvSpPr>
+        <p:spPr/>
+        <p:txBody>
+          <a:bodyPr/>
+          <a:lstStyle/>
+          <a:p>
+            <a:r>
+              <a:rPr lang="en-US" dirty="0"/>
+              <a:t>Trois idées à retenir. Un : la fiabilité vient du harness, pas seulement du modèle — le même modèle fait un travail très différent selon le harness. Deux : les règles importantes doivent être appliquées dans le code ; une règle dans un prompt est un vœu. Trois : l'étape suivante, ce sont des harness qui apprennent de leurs exécutions — mémoire, skills, vérificateurs — et cela ne marche que si le harness ne peut pas tricher avec ses propres contrôles. Agent-One, c'est là que nous mettons ces idées en œuvre, sur nos propres modèles. Merci — vos questions.</a:t>
+            </a:r>
+            <a:endParaRPr lang="en-US" dirty="0"/>
+          </a:p>
+        </p:txBody>
+      </p:sp>
+      <p:sp>
+        <p:nvSpPr>
+          <p:cNvPr id="4" name="Slide Number Placeholder 3"/>
+          <p:cNvSpPr>
+            <a:spLocks noGrp="1"/>
+          </p:cNvSpPr>
+          <p:nvPr>
+            <p:ph type="sldNum" sz="quarter" idx="10"/>
+          </p:nvPr>
+        </p:nvSpPr>
+        <p:spPr/>
+        <p:txBody>
+          <a:bodyPr/>
+          <a:lstStyle/>
+          <a:p>
+            <a:fld id="{F7021451-1387-4CA6-816F-3879F97B5CBC}" type="slidenum">
+              <a:rPr lang="en-US"/>
+              <a:t>23</a:t>
             </a:fld>
             <a:endParaRPr lang="en-US"/>
           </a:p>
@@ -7700,8 +7789,8 @@
         </p:blipFill>
         <p:spPr>
           <a:xfrm>
-            <a:off x="457200" y="1830881"/>
-            <a:ext cx="6766560" cy="2373278"/>
+            <a:off x="1395399" y="1554480"/>
+            <a:ext cx="4890161" cy="2926080"/>
           </a:xfrm>
           <a:prstGeom prst="rect">
             <a:avLst/>
@@ -9889,7 +9978,7 @@
                 <a:ea typeface="Calibri" pitchFamily="34" charset="-122"/>
                 <a:cs typeface="Calibri" pitchFamily="34" charset="-120"/>
               </a:rPr>
-              <a:t>espace de travail en écriture, le reste en lecture</a:t>
+              <a:t>processus et identifiants de l'hôte masqués · Seatbelt sur macOS · --docker-agent</a:t>
             </a:r>
             <a:endParaRPr lang="en-US" sz="1300" dirty="0"/>
           </a:p>
@@ -9911,8 +10000,8 @@
         </p:blipFill>
         <p:spPr>
           <a:xfrm>
-            <a:off x="5943600" y="1919669"/>
-            <a:ext cx="5669280" cy="1098423"/>
+            <a:off x="7250065" y="1554480"/>
+            <a:ext cx="3056351" cy="1828800"/>
           </a:xfrm>
           <a:prstGeom prst="rect">
             <a:avLst/>
@@ -10201,8 +10290,8 @@
         </p:blipFill>
         <p:spPr>
           <a:xfrm>
-            <a:off x="457200" y="1831829"/>
-            <a:ext cx="5577840" cy="2279942"/>
+            <a:off x="801039" y="1508760"/>
+            <a:ext cx="4890161" cy="2926080"/>
           </a:xfrm>
           <a:prstGeom prst="rect">
             <a:avLst/>
@@ -10225,8 +10314,8 @@
         </p:blipFill>
         <p:spPr>
           <a:xfrm>
-            <a:off x="6357267" y="1508760"/>
-            <a:ext cx="5207706" cy="2926080"/>
+            <a:off x="6516039" y="1508760"/>
+            <a:ext cx="4890161" cy="2926080"/>
           </a:xfrm>
           <a:prstGeom prst="rect">
             <a:avLst/>
@@ -10659,7 +10748,7 @@
                 <a:ea typeface="Calibri" pitchFamily="34" charset="-122"/>
                 <a:cs typeface="Calibri" pitchFamily="34" charset="-120"/>
               </a:rPr>
-              <a:t>graphe de propriété, usage, coût</a:t>
+              <a:t>le réseau neuronal en 2D et 3D, la valeur, chaque clé de config expliquée</a:t>
             </a:r>
             <a:endParaRPr lang="en-US" sz="1300" dirty="0"/>
           </a:p>
@@ -12910,7 +12999,7 @@
                 <a:ea typeface="Calibri" pitchFamily="34" charset="-122"/>
                 <a:cs typeface="Calibri" pitchFamily="34" charset="-120"/>
               </a:rPr>
-              <a:t>4 · CONFIGURATION</a:t>
+              <a:t>4 · MESURÉ ET SOIGNÉ</a:t>
             </a:r>
             <a:endParaRPr lang="en-US" sz="1100" dirty="0"/>
           </a:p>
@@ -12949,7 +13038,7 @@
                 <a:ea typeface="Cambria" pitchFamily="34" charset="-122"/>
                 <a:cs typeface="Cambria" pitchFamily="34" charset="-120"/>
               </a:rPr>
-              <a:t>Un fichier par partie ; les secrets nommés, jamais écrits</a:t>
+              <a:t>Valeur, tension et évolution, tout dans le code</a:t>
             </a:r>
             <a:endParaRPr lang="en-US" sz="3400" dirty="0"/>
           </a:p>
@@ -12963,12 +13052,12 @@
         </p:nvSpPr>
         <p:spPr>
           <a:xfrm>
-            <a:off x="548640" y="1554480"/>
-            <a:ext cx="4754880" cy="4480560"/>
+            <a:off x="548640" y="1600200"/>
+            <a:ext cx="3566160" cy="2011680"/>
           </a:xfrm>
           <a:prstGeom prst="roundRect">
             <a:avLst>
-              <a:gd name="adj" fmla="val 2449"/>
+              <a:gd name="adj" fmla="val 5455"/>
             </a:avLst>
           </a:prstGeom>
           <a:solidFill>
@@ -12990,8 +13079,47 @@
         </p:nvSpPr>
         <p:spPr>
           <a:xfrm>
-            <a:off x="777240" y="1737360"/>
-            <a:ext cx="4480560" cy="4114800"/>
+            <a:off x="777240" y="1764792"/>
+            <a:ext cx="3154680" cy="457200"/>
+          </a:xfrm>
+          <a:prstGeom prst="rect">
+            <a:avLst/>
+          </a:prstGeom>
+          <a:noFill/>
+          <a:ln/>
+        </p:spPr>
+        <p:txBody>
+          <a:bodyPr wrap="square" lIns="0" tIns="0" rIns="0" bIns="0" rtlCol="0" anchor="ctr"/>
+          <a:lstStyle/>
+          <a:p>
+            <a:pPr indent="0" marL="0">
+              <a:buNone/>
+            </a:pPr>
+            <a:r>
+              <a:rPr lang="en-US" sz="1700" b="1" dirty="0">
+                <a:solidFill>
+                  <a:srgbClr val="5FBF7A"/>
+                </a:solidFill>
+                <a:latin typeface="Calibri" pitchFamily="34" charset="0"/>
+                <a:ea typeface="Calibri" pitchFamily="34" charset="-122"/>
+                <a:cs typeface="Calibri" pitchFamily="34" charset="-120"/>
+              </a:rPr>
+              <a:t>Valeur</a:t>
+            </a:r>
+            <a:endParaRPr lang="en-US" sz="1700" dirty="0"/>
+          </a:p>
+        </p:txBody>
+      </p:sp>
+      <p:sp>
+        <p:nvSpPr>
+          <p:cNvPr id="9" name="Text 6"/>
+          <p:cNvSpPr txBox="1"/>
+          <p:nvPr/>
+        </p:nvSpPr>
+        <p:spPr>
+          <a:xfrm>
+            <a:off x="777240" y="2286000"/>
+            <a:ext cx="3108960" cy="1188720"/>
           </a:xfrm>
           <a:prstGeom prst="rect">
             <a:avLst/>
@@ -13004,181 +13132,48 @@
           <a:lstStyle/>
           <a:p>
             <a:pPr indent="0" marL="0">
-              <a:buNone/>
-            </a:pPr>
-            <a:r>
-              <a:rPr lang="en-US" sz="1300" dirty="0">
+              <a:spcAft>
+                <a:spcPts val="400"/>
+              </a:spcAft>
+              <a:buNone/>
+            </a:pPr>
+            <a:r>
+              <a:rPr lang="en-US" sz="1400" dirty="0">
                 <a:solidFill>
                   <a:srgbClr val="EEF3F9"/>
                 </a:solidFill>
-                <a:latin typeface="Courier New" pitchFamily="34" charset="0"/>
-                <a:ea typeface="Courier New" pitchFamily="34" charset="-122"/>
-                <a:cs typeface="Courier New" pitchFamily="34" charset="-120"/>
-              </a:rPr>
-              <a:t>.agent-one/</a:t>
-            </a:r>
-            <a:endParaRPr lang="en-US" sz="1300" dirty="0"/>
-          </a:p>
-          <a:p>
-            <a:pPr indent="0" marL="0">
-              <a:buNone/>
-            </a:pPr>
-            <a:r>
-              <a:rPr lang="en-US" sz="1300" dirty="0">
-                <a:solidFill>
-                  <a:srgbClr val="EEF3F9"/>
-                </a:solidFill>
-                <a:latin typeface="Courier New" pitchFamily="34" charset="0"/>
-                <a:ea typeface="Courier New" pitchFamily="34" charset="-122"/>
-                <a:cs typeface="Courier New" pitchFamily="34" charset="-120"/>
-              </a:rPr>
-              <a:t>├── config.yaml</a:t>
-            </a:r>
-            <a:endParaRPr lang="en-US" sz="1300" dirty="0"/>
-          </a:p>
-          <a:p>
-            <a:pPr indent="0" marL="0">
-              <a:buNone/>
-            </a:pPr>
-            <a:r>
-              <a:rPr lang="en-US" sz="1300" dirty="0">
-                <a:solidFill>
-                  <a:srgbClr val="EEF3F9"/>
-                </a:solidFill>
-                <a:latin typeface="Courier New" pitchFamily="34" charset="0"/>
-                <a:ea typeface="Courier New" pitchFamily="34" charset="-122"/>
-                <a:cs typeface="Courier New" pitchFamily="34" charset="-120"/>
-              </a:rPr>
-              <a:t>├── providers.yaml    the gateway</a:t>
-            </a:r>
-            <a:endParaRPr lang="en-US" sz="1300" dirty="0"/>
-          </a:p>
-          <a:p>
-            <a:pPr indent="0" marL="0">
-              <a:buNone/>
-            </a:pPr>
-            <a:r>
-              <a:rPr lang="en-US" sz="1300" dirty="0">
-                <a:solidFill>
-                  <a:srgbClr val="EEF3F9"/>
-                </a:solidFill>
-                <a:latin typeface="Courier New" pitchFamily="34" charset="0"/>
-                <a:ea typeface="Courier New" pitchFamily="34" charset="-122"/>
-                <a:cs typeface="Courier New" pitchFamily="34" charset="-120"/>
-              </a:rPr>
-              <a:t>├── registry.yaml     models · tools ·</a:t>
-            </a:r>
-            <a:endParaRPr lang="en-US" sz="1300" dirty="0"/>
-          </a:p>
-          <a:p>
-            <a:pPr indent="0" marL="0">
-              <a:buNone/>
-            </a:pPr>
-            <a:r>
-              <a:rPr lang="en-US" sz="1300" dirty="0">
-                <a:solidFill>
-                  <a:srgbClr val="EEF3F9"/>
-                </a:solidFill>
-                <a:latin typeface="Courier New" pitchFamily="34" charset="0"/>
-                <a:ea typeface="Courier New" pitchFamily="34" charset="-122"/>
-                <a:cs typeface="Courier New" pitchFamily="34" charset="-120"/>
-              </a:rPr>
-              <a:t>│                     Artifactory · images</a:t>
-            </a:r>
-            <a:endParaRPr lang="en-US" sz="1300" dirty="0"/>
-          </a:p>
-          <a:p>
-            <a:pPr indent="0" marL="0">
-              <a:buNone/>
-            </a:pPr>
-            <a:r>
-              <a:rPr lang="en-US" sz="1300" dirty="0">
-                <a:solidFill>
-                  <a:srgbClr val="EEF3F9"/>
-                </a:solidFill>
-                <a:latin typeface="Courier New" pitchFamily="34" charset="0"/>
-                <a:ea typeface="Courier New" pitchFamily="34" charset="-122"/>
-                <a:cs typeface="Courier New" pitchFamily="34" charset="-120"/>
-              </a:rPr>
-              <a:t>├── models.yaml       who runs on what</a:t>
-            </a:r>
-            <a:endParaRPr lang="en-US" sz="1300" dirty="0"/>
-          </a:p>
-          <a:p>
-            <a:pPr indent="0" marL="0">
-              <a:buNone/>
-            </a:pPr>
-            <a:r>
-              <a:rPr lang="en-US" sz="1300" dirty="0">
-                <a:solidFill>
-                  <a:srgbClr val="EEF3F9"/>
-                </a:solidFill>
-                <a:latin typeface="Courier New" pitchFamily="34" charset="0"/>
-                <a:ea typeface="Courier New" pitchFamily="34" charset="-122"/>
-                <a:cs typeface="Courier New" pitchFamily="34" charset="-120"/>
-              </a:rPr>
-              <a:t>├── guards.yaml       refused, always</a:t>
-            </a:r>
-            <a:endParaRPr lang="en-US" sz="1300" dirty="0"/>
-          </a:p>
-          <a:p>
-            <a:pPr indent="0" marL="0">
-              <a:buNone/>
-            </a:pPr>
-            <a:r>
-              <a:rPr lang="en-US" sz="1300" dirty="0">
-                <a:solidFill>
-                  <a:srgbClr val="EEF3F9"/>
-                </a:solidFill>
-                <a:latin typeface="Courier New" pitchFamily="34" charset="0"/>
-                <a:ea typeface="Courier New" pitchFamily="34" charset="-122"/>
-                <a:cs typeface="Courier New" pitchFamily="34" charset="-120"/>
-              </a:rPr>
-              <a:t>├── rules.yaml</a:t>
-            </a:r>
-            <a:endParaRPr lang="en-US" sz="1300" dirty="0"/>
-          </a:p>
-          <a:p>
-            <a:pPr indent="0" marL="0">
-              <a:buNone/>
-            </a:pPr>
-            <a:r>
-              <a:rPr lang="en-US" sz="1300" dirty="0">
-                <a:solidFill>
-                  <a:srgbClr val="EEF3F9"/>
-                </a:solidFill>
-                <a:latin typeface="Courier New" pitchFamily="34" charset="0"/>
-                <a:ea typeface="Courier New" pitchFamily="34" charset="-122"/>
-                <a:cs typeface="Courier New" pitchFamily="34" charset="-120"/>
-              </a:rPr>
-              <a:t>└── permissions.yaml</a:t>
-            </a:r>
-            <a:endParaRPr lang="en-US" sz="1300" dirty="0"/>
-          </a:p>
-        </p:txBody>
-      </p:sp>
-      <p:sp>
-        <p:nvSpPr>
-          <p:cNvPr id="9" name="Shape 6"/>
+                <a:latin typeface="Calibri" pitchFamily="34" charset="0"/>
+                <a:ea typeface="Calibri" pitchFamily="34" charset="-122"/>
+                <a:cs typeface="Calibri" pitchFamily="34" charset="-120"/>
+              </a:rPr>
+              <a:t>chaque rang noté sur son travail ; jauges sur les deux interfaces</a:t>
+            </a:r>
+            <a:endParaRPr lang="en-US" sz="1400" dirty="0"/>
+          </a:p>
+        </p:txBody>
+      </p:sp>
+      <p:sp>
+        <p:nvSpPr>
+          <p:cNvPr id="10" name="Shape 7"/>
           <p:cNvSpPr/>
           <p:nvPr/>
         </p:nvSpPr>
         <p:spPr>
           <a:xfrm>
-            <a:off x="5577840" y="1554480"/>
-            <a:ext cx="6035040" cy="3383280"/>
+            <a:off x="4297680" y="1600200"/>
+            <a:ext cx="3566160" cy="2011680"/>
           </a:xfrm>
           <a:prstGeom prst="roundRect">
             <a:avLst>
-              <a:gd name="adj" fmla="val 3243"/>
+              <a:gd name="adj" fmla="val 5455"/>
             </a:avLst>
           </a:prstGeom>
           <a:solidFill>
-            <a:srgbClr val="18304A"/>
+            <a:srgbClr val="13263B"/>
           </a:solidFill>
           <a:ln w="12700">
             <a:solidFill>
-              <a:srgbClr val="18304A"/>
+              <a:srgbClr val="13263B"/>
             </a:solidFill>
             <a:prstDash val="solid"/>
           </a:ln>
@@ -13186,14 +13181,53 @@
       </p:sp>
       <p:sp>
         <p:nvSpPr>
-          <p:cNvPr id="10" name="Text 7"/>
-          <p:cNvSpPr txBox="1"/>
-          <p:nvPr/>
-        </p:nvSpPr>
-        <p:spPr>
-          <a:xfrm>
-            <a:off x="5806440" y="1737360"/>
-            <a:ext cx="5669280" cy="3108960"/>
+          <p:cNvPr id="11" name="Text 8"/>
+          <p:cNvSpPr txBox="1"/>
+          <p:nvPr/>
+        </p:nvSpPr>
+        <p:spPr>
+          <a:xfrm>
+            <a:off x="4526280" y="1764792"/>
+            <a:ext cx="3154680" cy="457200"/>
+          </a:xfrm>
+          <a:prstGeom prst="rect">
+            <a:avLst/>
+          </a:prstGeom>
+          <a:noFill/>
+          <a:ln/>
+        </p:spPr>
+        <p:txBody>
+          <a:bodyPr wrap="square" lIns="0" tIns="0" rIns="0" bIns="0" rtlCol="0" anchor="ctr"/>
+          <a:lstStyle/>
+          <a:p>
+            <a:pPr indent="0" marL="0">
+              <a:buNone/>
+            </a:pPr>
+            <a:r>
+              <a:rPr lang="en-US" sz="1700" b="1" dirty="0">
+                <a:solidFill>
+                  <a:srgbClr val="D4AF37"/>
+                </a:solidFill>
+                <a:latin typeface="Calibri" pitchFamily="34" charset="0"/>
+                <a:ea typeface="Calibri" pitchFamily="34" charset="-122"/>
+                <a:cs typeface="Calibri" pitchFamily="34" charset="-120"/>
+              </a:rPr>
+              <a:t>Le conseil</a:t>
+            </a:r>
+            <a:endParaRPr lang="en-US" sz="1700" dirty="0"/>
+          </a:p>
+        </p:txBody>
+      </p:sp>
+      <p:sp>
+        <p:nvSpPr>
+          <p:cNvPr id="12" name="Text 9"/>
+          <p:cNvSpPr txBox="1"/>
+          <p:nvPr/>
+        </p:nvSpPr>
+        <p:spPr>
+          <a:xfrm>
+            <a:off x="4526280" y="2286000"/>
+            <a:ext cx="3108960" cy="1188720"/>
           </a:xfrm>
           <a:prstGeom prst="rect">
             <a:avLst/>
@@ -13206,215 +13240,48 @@
           <a:lstStyle/>
           <a:p>
             <a:pPr indent="0" marL="0">
-              <a:buNone/>
-            </a:pPr>
-            <a:r>
-              <a:rPr lang="en-US" sz="1200" dirty="0">
-                <a:solidFill>
-                  <a:srgbClr val="5FBF7A"/>
-                </a:solidFill>
-                <a:latin typeface="Courier New" pitchFamily="34" charset="0"/>
-                <a:ea typeface="Courier New" pitchFamily="34" charset="-122"/>
-                <a:cs typeface="Courier New" pitchFamily="34" charset="-120"/>
-              </a:rPr>
-              <a:t># registry.yaml</a:t>
-            </a:r>
-            <a:endParaRPr lang="en-US" sz="1200" dirty="0"/>
-          </a:p>
-          <a:p>
-            <a:pPr indent="0" marL="0">
-              <a:buNone/>
-            </a:pPr>
-            <a:r>
-              <a:rPr lang="en-US" sz="1200" dirty="0">
-                <a:solidFill>
-                  <a:srgbClr val="5FBF7A"/>
-                </a:solidFill>
-                <a:latin typeface="Courier New" pitchFamily="34" charset="0"/>
-                <a:ea typeface="Courier New" pitchFamily="34" charset="-122"/>
-                <a:cs typeface="Courier New" pitchFamily="34" charset="-120"/>
-              </a:rPr>
-              <a:t>models:</a:t>
-            </a:r>
-            <a:endParaRPr lang="en-US" sz="1200" dirty="0"/>
-          </a:p>
-          <a:p>
-            <a:pPr indent="0" marL="0">
-              <a:buNone/>
-            </a:pPr>
-            <a:r>
-              <a:rPr lang="en-US" sz="1200" dirty="0">
-                <a:solidFill>
-                  <a:srgbClr val="5FBF7A"/>
-                </a:solidFill>
-                <a:latin typeface="Courier New" pitchFamily="34" charset="0"/>
-                <a:ea typeface="Courier New" pitchFamily="34" charset="-122"/>
-                <a:cs typeface="Courier New" pitchFamily="34" charset="-120"/>
-              </a:rPr>
-              <a:t>  gateway/muse-glimmer: { tier: 1 }</a:t>
-            </a:r>
-            <a:endParaRPr lang="en-US" sz="1200" dirty="0"/>
-          </a:p>
-          <a:p>
-            <a:pPr indent="0" marL="0">
-              <a:buNone/>
-            </a:pPr>
-            <a:r>
-              <a:rPr lang="en-US" sz="1200" dirty="0">
-                <a:solidFill>
-                  <a:srgbClr val="5FBF7A"/>
-                </a:solidFill>
-                <a:latin typeface="Courier New" pitchFamily="34" charset="0"/>
-                <a:ea typeface="Courier New" pitchFamily="34" charset="-122"/>
-                <a:cs typeface="Courier New" pitchFamily="34" charset="-120"/>
-              </a:rPr>
-              <a:t>  gateway/glm-5-3:      { tier: 2 }</a:t>
-            </a:r>
-            <a:endParaRPr lang="en-US" sz="1200" dirty="0"/>
-          </a:p>
-          <a:p>
-            <a:pPr indent="0" marL="0">
-              <a:buNone/>
-            </a:pPr>
-            <a:r>
-              <a:rPr lang="en-US" sz="1200" dirty="0">
-                <a:solidFill>
-                  <a:srgbClr val="5FBF7A"/>
-                </a:solidFill>
-                <a:latin typeface="Courier New" pitchFamily="34" charset="0"/>
-                <a:ea typeface="Courier New" pitchFamily="34" charset="-122"/>
-                <a:cs typeface="Courier New" pitchFamily="34" charset="-120"/>
-              </a:rPr>
-              <a:t>  gateway/kimi-k3:      { tier: 3 }</a:t>
-            </a:r>
-            <a:endParaRPr lang="en-US" sz="1200" dirty="0"/>
-          </a:p>
-          <a:p>
-            <a:pPr indent="0" marL="0">
-              <a:buNone/>
-            </a:pPr>
-            <a:r>
-              <a:rPr lang="en-US" sz="1200" dirty="0">
-                <a:solidFill>
-                  <a:srgbClr val="5FBF7A"/>
-                </a:solidFill>
-                <a:latin typeface="Courier New" pitchFamily="34" charset="0"/>
-                <a:ea typeface="Courier New" pitchFamily="34" charset="-122"/>
-                <a:cs typeface="Courier New" pitchFamily="34" charset="-120"/>
-              </a:rPr>
-              <a:t>packages:</a:t>
-            </a:r>
-            <a:endParaRPr lang="en-US" sz="1200" dirty="0"/>
-          </a:p>
-          <a:p>
-            <a:pPr indent="0" marL="0">
-              <a:buNone/>
-            </a:pPr>
-            <a:r>
-              <a:rPr lang="en-US" sz="1200" dirty="0">
-                <a:solidFill>
-                  <a:srgbClr val="5FBF7A"/>
-                </a:solidFill>
-                <a:latin typeface="Courier New" pitchFamily="34" charset="0"/>
-                <a:ea typeface="Courier New" pitchFamily="34" charset="-122"/>
-                <a:cs typeface="Courier New" pitchFamily="34" charset="-120"/>
-              </a:rPr>
-              <a:t>  npm: https://artifactory…/npm-remote/</a:t>
-            </a:r>
-            <a:endParaRPr lang="en-US" sz="1200" dirty="0"/>
-          </a:p>
-          <a:p>
-            <a:pPr indent="0" marL="0">
-              <a:buNone/>
-            </a:pPr>
-            <a:r>
-              <a:rPr lang="en-US" sz="1200" dirty="0">
-                <a:solidFill>
-                  <a:srgbClr val="5FBF7A"/>
-                </a:solidFill>
-                <a:latin typeface="Courier New" pitchFamily="34" charset="0"/>
-                <a:ea typeface="Courier New" pitchFamily="34" charset="-122"/>
-                <a:cs typeface="Courier New" pitchFamily="34" charset="-120"/>
-              </a:rPr>
-              <a:t>  pip: https://artifactory…/pypi-remote/simple</a:t>
-            </a:r>
-            <a:endParaRPr lang="en-US" sz="1200" dirty="0"/>
-          </a:p>
-          <a:p>
-            <a:pPr indent="0" marL="0">
-              <a:buNone/>
-            </a:pPr>
-            <a:r>
-              <a:rPr lang="en-US" sz="1200" dirty="0">
-                <a:solidFill>
-                  <a:srgbClr val="5FBF7A"/>
-                </a:solidFill>
-                <a:latin typeface="Courier New" pitchFamily="34" charset="0"/>
-                <a:ea typeface="Courier New" pitchFamily="34" charset="-122"/>
-                <a:cs typeface="Courier New" pitchFamily="34" charset="-120"/>
-              </a:rPr>
-              <a:t>  tokenEnv: ARTIFACTORY_TOKEN   # the name only</a:t>
-            </a:r>
-            <a:endParaRPr lang="en-US" sz="1200" dirty="0"/>
-          </a:p>
-          <a:p>
-            <a:pPr indent="0" marL="0">
-              <a:buNone/>
-            </a:pPr>
-            <a:r>
-              <a:rPr lang="en-US" sz="1200" dirty="0">
-                <a:solidFill>
-                  <a:srgbClr val="5FBF7A"/>
-                </a:solidFill>
-                <a:latin typeface="Courier New" pitchFamily="34" charset="0"/>
-                <a:ea typeface="Courier New" pitchFamily="34" charset="-122"/>
-                <a:cs typeface="Courier New" pitchFamily="34" charset="-120"/>
-              </a:rPr>
-              <a:t>containers:</a:t>
-            </a:r>
-            <a:endParaRPr lang="en-US" sz="1200" dirty="0"/>
-          </a:p>
-          <a:p>
-            <a:pPr indent="0" marL="0">
-              <a:buNone/>
-            </a:pPr>
-            <a:r>
-              <a:rPr lang="en-US" sz="1200" dirty="0">
-                <a:solidFill>
-                  <a:srgbClr val="5FBF7A"/>
-                </a:solidFill>
-                <a:latin typeface="Courier New" pitchFamily="34" charset="0"/>
-                <a:ea typeface="Courier New" pitchFamily="34" charset="-122"/>
-                <a:cs typeface="Courier New" pitchFamily="34" charset="-120"/>
-              </a:rPr>
-              <a:t>  base: artifactory…/debian:bookworm-slim</a:t>
-            </a:r>
-            <a:endParaRPr lang="en-US" sz="1200" dirty="0"/>
-          </a:p>
-        </p:txBody>
-      </p:sp>
-      <p:sp>
-        <p:nvSpPr>
-          <p:cNvPr id="11" name="Shape 8"/>
+              <a:spcAft>
+                <a:spcPts val="400"/>
+              </a:spcAft>
+              <a:buNone/>
+            </a:pPr>
+            <a:r>
+              <a:rPr lang="en-US" sz="1400" dirty="0">
+                <a:solidFill>
+                  <a:srgbClr val="EEF3F9"/>
+                </a:solidFill>
+                <a:latin typeface="Calibri" pitchFamily="34" charset="0"/>
+                <a:ea typeface="Calibri" pitchFamily="34" charset="-122"/>
+                <a:cs typeface="Calibri" pitchFamily="34" charset="-120"/>
+              </a:rPr>
+              <a:t>tension 5 : le responsable répond · 3 réponses : vers vous</a:t>
+            </a:r>
+            <a:endParaRPr lang="en-US" sz="1400" dirty="0"/>
+          </a:p>
+        </p:txBody>
+      </p:sp>
+      <p:sp>
+        <p:nvSpPr>
+          <p:cNvPr id="13" name="Shape 10"/>
           <p:cNvSpPr/>
           <p:nvPr/>
         </p:nvSpPr>
         <p:spPr>
           <a:xfrm>
-            <a:off x="5577840" y="5166360"/>
-            <a:ext cx="6035040" cy="384048"/>
+            <a:off x="8046720" y="1600200"/>
+            <a:ext cx="3566160" cy="2011680"/>
           </a:xfrm>
           <a:prstGeom prst="roundRect">
             <a:avLst>
-              <a:gd name="adj" fmla="val 50000"/>
+              <a:gd name="adj" fmla="val 5455"/>
             </a:avLst>
           </a:prstGeom>
           <a:solidFill>
-            <a:srgbClr val="D4AF37"/>
+            <a:srgbClr val="13263B"/>
           </a:solidFill>
           <a:ln w="12700">
             <a:solidFill>
-              <a:srgbClr val="D4AF37"/>
+              <a:srgbClr val="13263B"/>
             </a:solidFill>
             <a:prstDash val="solid"/>
           </a:ln>
@@ -13422,40 +13289,406 @@
       </p:sp>
       <p:sp>
         <p:nvSpPr>
-          <p:cNvPr id="12" name="Text 9"/>
-          <p:cNvSpPr txBox="1"/>
-          <p:nvPr/>
-        </p:nvSpPr>
-        <p:spPr>
-          <a:xfrm>
-            <a:off x="5577840" y="5166360"/>
-            <a:ext cx="6035040" cy="384048"/>
-          </a:xfrm>
-          <a:prstGeom prst="rect">
-            <a:avLst/>
-          </a:prstGeom>
-          <a:noFill/>
-          <a:ln/>
-        </p:spPr>
-        <p:txBody>
-          <a:bodyPr wrap="square" lIns="0" tIns="0" rIns="0" bIns="0" rtlCol="0" anchor="ctr"/>
-          <a:lstStyle/>
-          <a:p>
-            <a:pPr algn="ctr" indent="0" marL="0">
-              <a:buNone/>
-            </a:pPr>
-            <a:r>
-              <a:rPr lang="en-US" sz="1300" b="1" dirty="0">
-                <a:solidFill>
-                  <a:srgbClr val="0B1A2B"/>
-                </a:solidFill>
-                <a:latin typeface="Calibri" pitchFamily="34" charset="0"/>
-                <a:ea typeface="Calibri" pitchFamily="34" charset="-122"/>
-                <a:cs typeface="Calibri" pitchFamily="34" charset="-120"/>
-              </a:rPr>
-              <a:t>agent-one config explain → chaque valeur, son fichier et sa ligne</a:t>
-            </a:r>
-            <a:endParaRPr lang="en-US" sz="1300" dirty="0"/>
+          <p:cNvPr id="14" name="Text 11"/>
+          <p:cNvSpPr txBox="1"/>
+          <p:nvPr/>
+        </p:nvSpPr>
+        <p:spPr>
+          <a:xfrm>
+            <a:off x="8275320" y="1764792"/>
+            <a:ext cx="3154680" cy="457200"/>
+          </a:xfrm>
+          <a:prstGeom prst="rect">
+            <a:avLst/>
+          </a:prstGeom>
+          <a:noFill/>
+          <a:ln/>
+        </p:spPr>
+        <p:txBody>
+          <a:bodyPr wrap="square" lIns="0" tIns="0" rIns="0" bIns="0" rtlCol="0" anchor="ctr"/>
+          <a:lstStyle/>
+          <a:p>
+            <a:pPr indent="0" marL="0">
+              <a:buNone/>
+            </a:pPr>
+            <a:r>
+              <a:rPr lang="en-US" sz="1700" b="1" dirty="0">
+                <a:solidFill>
+                  <a:srgbClr val="E0645A"/>
+                </a:solidFill>
+                <a:latin typeface="Calibri" pitchFamily="34" charset="0"/>
+                <a:ea typeface="Calibri" pitchFamily="34" charset="-122"/>
+                <a:cs typeface="Calibri" pitchFamily="34" charset="-120"/>
+              </a:rPr>
+              <a:t>Allègement</a:t>
+            </a:r>
+            <a:endParaRPr lang="en-US" sz="1700" dirty="0"/>
+          </a:p>
+        </p:txBody>
+      </p:sp>
+      <p:sp>
+        <p:nvSpPr>
+          <p:cNvPr id="15" name="Text 12"/>
+          <p:cNvSpPr txBox="1"/>
+          <p:nvPr/>
+        </p:nvSpPr>
+        <p:spPr>
+          <a:xfrm>
+            <a:off x="8275320" y="2286000"/>
+            <a:ext cx="3108960" cy="1188720"/>
+          </a:xfrm>
+          <a:prstGeom prst="rect">
+            <a:avLst/>
+          </a:prstGeom>
+          <a:noFill/>
+          <a:ln/>
+        </p:spPr>
+        <p:txBody>
+          <a:bodyPr wrap="square" lIns="0" tIns="0" rIns="0" bIns="0" rtlCol="0" anchor="t"/>
+          <a:lstStyle/>
+          <a:p>
+            <a:pPr indent="0" marL="0">
+              <a:spcAft>
+                <a:spcPts val="400"/>
+              </a:spcAft>
+              <a:buNone/>
+            </a:pPr>
+            <a:r>
+              <a:rPr lang="en-US" sz="1400" dirty="0">
+                <a:solidFill>
+                  <a:srgbClr val="EEF3F9"/>
+                </a:solidFill>
+                <a:latin typeface="Calibri" pitchFamily="34" charset="0"/>
+                <a:ea typeface="Calibri" pitchFamily="34" charset="-122"/>
+                <a:cs typeface="Calibri" pitchFamily="34" charset="-120"/>
+              </a:rPr>
+              <a:t>tension 7 : la zone est découpée ou retirée</a:t>
+            </a:r>
+            <a:endParaRPr lang="en-US" sz="1400" dirty="0"/>
+          </a:p>
+        </p:txBody>
+      </p:sp>
+      <p:sp>
+        <p:nvSpPr>
+          <p:cNvPr id="16" name="Shape 13"/>
+          <p:cNvSpPr/>
+          <p:nvPr/>
+        </p:nvSpPr>
+        <p:spPr>
+          <a:xfrm>
+            <a:off x="548640" y="3840480"/>
+            <a:ext cx="3566160" cy="2011680"/>
+          </a:xfrm>
+          <a:prstGeom prst="roundRect">
+            <a:avLst>
+              <a:gd name="adj" fmla="val 5455"/>
+            </a:avLst>
+          </a:prstGeom>
+          <a:solidFill>
+            <a:srgbClr val="13263B"/>
+          </a:solidFill>
+          <a:ln w="12700">
+            <a:solidFill>
+              <a:srgbClr val="13263B"/>
+            </a:solidFill>
+            <a:prstDash val="solid"/>
+          </a:ln>
+        </p:spPr>
+      </p:sp>
+      <p:sp>
+        <p:nvSpPr>
+          <p:cNvPr id="17" name="Text 14"/>
+          <p:cNvSpPr txBox="1"/>
+          <p:nvPr/>
+        </p:nvSpPr>
+        <p:spPr>
+          <a:xfrm>
+            <a:off x="777240" y="4005072"/>
+            <a:ext cx="3154680" cy="457200"/>
+          </a:xfrm>
+          <a:prstGeom prst="rect">
+            <a:avLst/>
+          </a:prstGeom>
+          <a:noFill/>
+          <a:ln/>
+        </p:spPr>
+        <p:txBody>
+          <a:bodyPr wrap="square" lIns="0" tIns="0" rIns="0" bIns="0" rtlCol="0" anchor="ctr"/>
+          <a:lstStyle/>
+          <a:p>
+            <a:pPr indent="0" marL="0">
+              <a:buNone/>
+            </a:pPr>
+            <a:r>
+              <a:rPr lang="en-US" sz="1700" b="1" dirty="0">
+                <a:solidFill>
+                  <a:srgbClr val="8E72E6"/>
+                </a:solidFill>
+                <a:latin typeface="Calibri" pitchFamily="34" charset="0"/>
+                <a:ea typeface="Calibri" pitchFamily="34" charset="-122"/>
+                <a:cs typeface="Calibri" pitchFamily="34" charset="-120"/>
+              </a:rPr>
+              <a:t>Évolution</a:t>
+            </a:r>
+            <a:endParaRPr lang="en-US" sz="1700" dirty="0"/>
+          </a:p>
+        </p:txBody>
+      </p:sp>
+      <p:sp>
+        <p:nvSpPr>
+          <p:cNvPr id="18" name="Text 15"/>
+          <p:cNvSpPr txBox="1"/>
+          <p:nvPr/>
+        </p:nvSpPr>
+        <p:spPr>
+          <a:xfrm>
+            <a:off x="777240" y="4526280"/>
+            <a:ext cx="3108960" cy="1188720"/>
+          </a:xfrm>
+          <a:prstGeom prst="rect">
+            <a:avLst/>
+          </a:prstGeom>
+          <a:noFill/>
+          <a:ln/>
+        </p:spPr>
+        <p:txBody>
+          <a:bodyPr wrap="square" lIns="0" tIns="0" rIns="0" bIns="0" rtlCol="0" anchor="t"/>
+          <a:lstStyle/>
+          <a:p>
+            <a:pPr indent="0" marL="0">
+              <a:spcAft>
+                <a:spcPts val="400"/>
+              </a:spcAft>
+              <a:buNone/>
+            </a:pPr>
+            <a:r>
+              <a:rPr lang="en-US" sz="1400" dirty="0">
+                <a:solidFill>
+                  <a:srgbClr val="EEF3F9"/>
+                </a:solidFill>
+                <a:latin typeface="Calibri" pitchFamily="34" charset="0"/>
+                <a:ea typeface="Calibri" pitchFamily="34" charset="-122"/>
+                <a:cs typeface="Calibri" pitchFamily="34" charset="-120"/>
+              </a:rPr>
+              <a:t>scission · mutation · renaissance — prouvée avant d'être appliquée</a:t>
+            </a:r>
+            <a:endParaRPr lang="en-US" sz="1400" dirty="0"/>
+          </a:p>
+        </p:txBody>
+      </p:sp>
+      <p:sp>
+        <p:nvSpPr>
+          <p:cNvPr id="19" name="Shape 16"/>
+          <p:cNvSpPr/>
+          <p:nvPr/>
+        </p:nvSpPr>
+        <p:spPr>
+          <a:xfrm>
+            <a:off x="4297680" y="3840480"/>
+            <a:ext cx="3566160" cy="2011680"/>
+          </a:xfrm>
+          <a:prstGeom prst="roundRect">
+            <a:avLst>
+              <a:gd name="adj" fmla="val 5455"/>
+            </a:avLst>
+          </a:prstGeom>
+          <a:solidFill>
+            <a:srgbClr val="13263B"/>
+          </a:solidFill>
+          <a:ln w="12700">
+            <a:solidFill>
+              <a:srgbClr val="13263B"/>
+            </a:solidFill>
+            <a:prstDash val="solid"/>
+          </a:ln>
+        </p:spPr>
+      </p:sp>
+      <p:sp>
+        <p:nvSpPr>
+          <p:cNvPr id="20" name="Text 17"/>
+          <p:cNvSpPr txBox="1"/>
+          <p:nvPr/>
+        </p:nvSpPr>
+        <p:spPr>
+          <a:xfrm>
+            <a:off x="4526280" y="4005072"/>
+            <a:ext cx="3154680" cy="457200"/>
+          </a:xfrm>
+          <a:prstGeom prst="rect">
+            <a:avLst/>
+          </a:prstGeom>
+          <a:noFill/>
+          <a:ln/>
+        </p:spPr>
+        <p:txBody>
+          <a:bodyPr wrap="square" lIns="0" tIns="0" rIns="0" bIns="0" rtlCol="0" anchor="ctr"/>
+          <a:lstStyle/>
+          <a:p>
+            <a:pPr indent="0" marL="0">
+              <a:buNone/>
+            </a:pPr>
+            <a:r>
+              <a:rPr lang="en-US" sz="1700" b="1" dirty="0">
+                <a:solidFill>
+                  <a:srgbClr val="2BA3C7"/>
+                </a:solidFill>
+                <a:latin typeface="Calibri" pitchFamily="34" charset="0"/>
+                <a:ea typeface="Calibri" pitchFamily="34" charset="-122"/>
+                <a:cs typeface="Calibri" pitchFamily="34" charset="-120"/>
+              </a:rPr>
+              <a:t>La forge</a:t>
+            </a:r>
+            <a:endParaRPr lang="en-US" sz="1700" dirty="0"/>
+          </a:p>
+        </p:txBody>
+      </p:sp>
+      <p:sp>
+        <p:nvSpPr>
+          <p:cNvPr id="21" name="Text 18"/>
+          <p:cNvSpPr txBox="1"/>
+          <p:nvPr/>
+        </p:nvSpPr>
+        <p:spPr>
+          <a:xfrm>
+            <a:off x="4526280" y="4526280"/>
+            <a:ext cx="3108960" cy="1188720"/>
+          </a:xfrm>
+          <a:prstGeom prst="rect">
+            <a:avLst/>
+          </a:prstGeom>
+          <a:noFill/>
+          <a:ln/>
+        </p:spPr>
+        <p:txBody>
+          <a:bodyPr wrap="square" lIns="0" tIns="0" rIns="0" bIns="0" rtlCol="0" anchor="t"/>
+          <a:lstStyle/>
+          <a:p>
+            <a:pPr indent="0" marL="0">
+              <a:spcAft>
+                <a:spcPts val="400"/>
+              </a:spcAft>
+              <a:buNone/>
+            </a:pPr>
+            <a:r>
+              <a:rPr lang="en-US" sz="1400" dirty="0">
+                <a:solidFill>
+                  <a:srgbClr val="EEF3F9"/>
+                </a:solidFill>
+                <a:latin typeface="Calibri" pitchFamily="34" charset="0"/>
+                <a:ea typeface="Calibri" pitchFamily="34" charset="-122"/>
+                <a:cs typeface="Calibri" pitchFamily="34" charset="-120"/>
+              </a:rPr>
+              <a:t>ce qu'une exécution a prouvé devient une skill, que vous approuvez</a:t>
+            </a:r>
+            <a:endParaRPr lang="en-US" sz="1400" dirty="0"/>
+          </a:p>
+        </p:txBody>
+      </p:sp>
+      <p:sp>
+        <p:nvSpPr>
+          <p:cNvPr id="22" name="Shape 19"/>
+          <p:cNvSpPr/>
+          <p:nvPr/>
+        </p:nvSpPr>
+        <p:spPr>
+          <a:xfrm>
+            <a:off x="8046720" y="3840480"/>
+            <a:ext cx="3566160" cy="2011680"/>
+          </a:xfrm>
+          <a:prstGeom prst="roundRect">
+            <a:avLst>
+              <a:gd name="adj" fmla="val 5455"/>
+            </a:avLst>
+          </a:prstGeom>
+          <a:solidFill>
+            <a:srgbClr val="13263B"/>
+          </a:solidFill>
+          <a:ln w="12700">
+            <a:solidFill>
+              <a:srgbClr val="13263B"/>
+            </a:solidFill>
+            <a:prstDash val="solid"/>
+          </a:ln>
+        </p:spPr>
+      </p:sp>
+      <p:sp>
+        <p:nvSpPr>
+          <p:cNvPr id="23" name="Text 20"/>
+          <p:cNvSpPr txBox="1"/>
+          <p:nvPr/>
+        </p:nvSpPr>
+        <p:spPr>
+          <a:xfrm>
+            <a:off x="8275320" y="4005072"/>
+            <a:ext cx="3154680" cy="457200"/>
+          </a:xfrm>
+          <a:prstGeom prst="rect">
+            <a:avLst/>
+          </a:prstGeom>
+          <a:noFill/>
+          <a:ln/>
+        </p:spPr>
+        <p:txBody>
+          <a:bodyPr wrap="square" lIns="0" tIns="0" rIns="0" bIns="0" rtlCol="0" anchor="ctr"/>
+          <a:lstStyle/>
+          <a:p>
+            <a:pPr indent="0" marL="0">
+              <a:buNone/>
+            </a:pPr>
+            <a:r>
+              <a:rPr lang="en-US" sz="1700" b="1" dirty="0">
+                <a:solidFill>
+                  <a:srgbClr val="8FA3B8"/>
+                </a:solidFill>
+                <a:latin typeface="Calibri" pitchFamily="34" charset="0"/>
+                <a:ea typeface="Calibri" pitchFamily="34" charset="-122"/>
+                <a:cs typeface="Calibri" pitchFamily="34" charset="-120"/>
+              </a:rPr>
+              <a:t>policy.value · .stress · .evolution</a:t>
+            </a:r>
+            <a:endParaRPr lang="en-US" sz="1700" dirty="0"/>
+          </a:p>
+        </p:txBody>
+      </p:sp>
+      <p:sp>
+        <p:nvSpPr>
+          <p:cNvPr id="24" name="Text 21"/>
+          <p:cNvSpPr txBox="1"/>
+          <p:nvPr/>
+        </p:nvSpPr>
+        <p:spPr>
+          <a:xfrm>
+            <a:off x="8275320" y="4526280"/>
+            <a:ext cx="3108960" cy="1188720"/>
+          </a:xfrm>
+          <a:prstGeom prst="rect">
+            <a:avLst/>
+          </a:prstGeom>
+          <a:noFill/>
+          <a:ln/>
+        </p:spPr>
+        <p:txBody>
+          <a:bodyPr wrap="square" lIns="0" tIns="0" rIns="0" bIns="0" rtlCol="0" anchor="t"/>
+          <a:lstStyle/>
+          <a:p>
+            <a:pPr indent="0" marL="0">
+              <a:spcAft>
+                <a:spcPts val="400"/>
+              </a:spcAft>
+              <a:buNone/>
+            </a:pPr>
+            <a:r>
+              <a:rPr lang="en-US" sz="1400" dirty="0">
+                <a:solidFill>
+                  <a:srgbClr val="EEF3F9"/>
+                </a:solidFill>
+                <a:latin typeface="Calibri" pitchFamily="34" charset="0"/>
+                <a:ea typeface="Calibri" pitchFamily="34" charset="-122"/>
+                <a:cs typeface="Calibri" pitchFamily="34" charset="-120"/>
+              </a:rPr>
+              <a:t>chaque seuil en config ; toute désactivation est affichée</a:t>
+            </a:r>
+            <a:endParaRPr lang="en-US" sz="1400" dirty="0"/>
           </a:p>
         </p:txBody>
       </p:sp>
@@ -13602,7 +13835,7 @@
                 <a:ea typeface="Calibri" pitchFamily="34" charset="-122"/>
                 <a:cs typeface="Calibri" pitchFamily="34" charset="-120"/>
               </a:rPr>
-              <a:t>DÉMO</a:t>
+              <a:t>4 · CONFIGURATION</a:t>
             </a:r>
             <a:endParaRPr lang="en-US" sz="1100" dirty="0"/>
           </a:p>
@@ -13641,7 +13874,7 @@
                 <a:ea typeface="Cambria" pitchFamily="34" charset="-122"/>
                 <a:cs typeface="Cambria" pitchFamily="34" charset="-120"/>
               </a:rPr>
-              <a:t>En direct, sur nos modèles vLLM</a:t>
+              <a:t>Un fichier par partie ; les secrets nommés, jamais écrits</a:t>
             </a:r>
             <a:endParaRPr lang="en-US" sz="3400" dirty="0"/>
           </a:p>
@@ -13655,12 +13888,12 @@
         </p:nvSpPr>
         <p:spPr>
           <a:xfrm>
-            <a:off x="548640" y="1645920"/>
-            <a:ext cx="2103120" cy="1188720"/>
+            <a:off x="548640" y="1554480"/>
+            <a:ext cx="4754880" cy="4480560"/>
           </a:xfrm>
           <a:prstGeom prst="roundRect">
             <a:avLst>
-              <a:gd name="adj" fmla="val 9231"/>
+              <a:gd name="adj" fmla="val 2449"/>
             </a:avLst>
           </a:prstGeom>
           <a:solidFill>
@@ -13682,34 +13915,170 @@
         </p:nvSpPr>
         <p:spPr>
           <a:xfrm>
-            <a:off x="777240" y="1810512"/>
-            <a:ext cx="1691640" cy="457200"/>
-          </a:xfrm>
-          <a:prstGeom prst="rect">
-            <a:avLst/>
-          </a:prstGeom>
-          <a:noFill/>
-          <a:ln/>
-        </p:spPr>
-        <p:txBody>
-          <a:bodyPr wrap="square" lIns="0" tIns="0" rIns="0" bIns="0" rtlCol="0" anchor="ctr"/>
-          <a:lstStyle/>
-          <a:p>
-            <a:pPr indent="0" marL="0">
-              <a:buNone/>
-            </a:pPr>
-            <a:r>
-              <a:rPr lang="en-US" sz="1700" b="1" dirty="0">
-                <a:solidFill>
-                  <a:srgbClr val="2BA3C7"/>
-                </a:solidFill>
-                <a:latin typeface="Calibri" pitchFamily="34" charset="0"/>
-                <a:ea typeface="Calibri" pitchFamily="34" charset="-122"/>
-                <a:cs typeface="Calibri" pitchFamily="34" charset="-120"/>
-              </a:rPr>
-              <a:t>Agent-One</a:t>
-            </a:r>
-            <a:endParaRPr lang="en-US" sz="1700" dirty="0"/>
+            <a:off x="777240" y="1737360"/>
+            <a:ext cx="4480560" cy="4114800"/>
+          </a:xfrm>
+          <a:prstGeom prst="rect">
+            <a:avLst/>
+          </a:prstGeom>
+          <a:noFill/>
+          <a:ln/>
+        </p:spPr>
+        <p:txBody>
+          <a:bodyPr wrap="square" lIns="0" tIns="0" rIns="0" bIns="0" rtlCol="0" anchor="t"/>
+          <a:lstStyle/>
+          <a:p>
+            <a:pPr indent="0" marL="0">
+              <a:buNone/>
+            </a:pPr>
+            <a:r>
+              <a:rPr lang="en-US" sz="1300" dirty="0">
+                <a:solidFill>
+                  <a:srgbClr val="EEF3F9"/>
+                </a:solidFill>
+                <a:latin typeface="Courier New" pitchFamily="34" charset="0"/>
+                <a:ea typeface="Courier New" pitchFamily="34" charset="-122"/>
+                <a:cs typeface="Courier New" pitchFamily="34" charset="-120"/>
+              </a:rPr>
+              <a:t>.agent-one/</a:t>
+            </a:r>
+            <a:endParaRPr lang="en-US" sz="1300" dirty="0"/>
+          </a:p>
+          <a:p>
+            <a:pPr indent="0" marL="0">
+              <a:buNone/>
+            </a:pPr>
+            <a:r>
+              <a:rPr lang="en-US" sz="1300" dirty="0">
+                <a:solidFill>
+                  <a:srgbClr val="EEF3F9"/>
+                </a:solidFill>
+                <a:latin typeface="Courier New" pitchFamily="34" charset="0"/>
+                <a:ea typeface="Courier New" pitchFamily="34" charset="-122"/>
+                <a:cs typeface="Courier New" pitchFamily="34" charset="-120"/>
+              </a:rPr>
+              <a:t>├── config.yaml</a:t>
+            </a:r>
+            <a:endParaRPr lang="en-US" sz="1300" dirty="0"/>
+          </a:p>
+          <a:p>
+            <a:pPr indent="0" marL="0">
+              <a:buNone/>
+            </a:pPr>
+            <a:r>
+              <a:rPr lang="en-US" sz="1300" dirty="0">
+                <a:solidFill>
+                  <a:srgbClr val="EEF3F9"/>
+                </a:solidFill>
+                <a:latin typeface="Courier New" pitchFamily="34" charset="0"/>
+                <a:ea typeface="Courier New" pitchFamily="34" charset="-122"/>
+                <a:cs typeface="Courier New" pitchFamily="34" charset="-120"/>
+              </a:rPr>
+              <a:t>├── providers.yaml    the gateway</a:t>
+            </a:r>
+            <a:endParaRPr lang="en-US" sz="1300" dirty="0"/>
+          </a:p>
+          <a:p>
+            <a:pPr indent="0" marL="0">
+              <a:buNone/>
+            </a:pPr>
+            <a:r>
+              <a:rPr lang="en-US" sz="1300" dirty="0">
+                <a:solidFill>
+                  <a:srgbClr val="EEF3F9"/>
+                </a:solidFill>
+                <a:latin typeface="Courier New" pitchFamily="34" charset="0"/>
+                <a:ea typeface="Courier New" pitchFamily="34" charset="-122"/>
+                <a:cs typeface="Courier New" pitchFamily="34" charset="-120"/>
+              </a:rPr>
+              <a:t>├── registry.yaml     models · tools ·</a:t>
+            </a:r>
+            <a:endParaRPr lang="en-US" sz="1300" dirty="0"/>
+          </a:p>
+          <a:p>
+            <a:pPr indent="0" marL="0">
+              <a:buNone/>
+            </a:pPr>
+            <a:r>
+              <a:rPr lang="en-US" sz="1300" dirty="0">
+                <a:solidFill>
+                  <a:srgbClr val="EEF3F9"/>
+                </a:solidFill>
+                <a:latin typeface="Courier New" pitchFamily="34" charset="0"/>
+                <a:ea typeface="Courier New" pitchFamily="34" charset="-122"/>
+                <a:cs typeface="Courier New" pitchFamily="34" charset="-120"/>
+              </a:rPr>
+              <a:t>│                     Artifactory · images</a:t>
+            </a:r>
+            <a:endParaRPr lang="en-US" sz="1300" dirty="0"/>
+          </a:p>
+          <a:p>
+            <a:pPr indent="0" marL="0">
+              <a:buNone/>
+            </a:pPr>
+            <a:r>
+              <a:rPr lang="en-US" sz="1300" dirty="0">
+                <a:solidFill>
+                  <a:srgbClr val="EEF3F9"/>
+                </a:solidFill>
+                <a:latin typeface="Courier New" pitchFamily="34" charset="0"/>
+                <a:ea typeface="Courier New" pitchFamily="34" charset="-122"/>
+                <a:cs typeface="Courier New" pitchFamily="34" charset="-120"/>
+              </a:rPr>
+              <a:t>├── models.yaml       who runs on what</a:t>
+            </a:r>
+            <a:endParaRPr lang="en-US" sz="1300" dirty="0"/>
+          </a:p>
+          <a:p>
+            <a:pPr indent="0" marL="0">
+              <a:buNone/>
+            </a:pPr>
+            <a:r>
+              <a:rPr lang="en-US" sz="1300" dirty="0">
+                <a:solidFill>
+                  <a:srgbClr val="EEF3F9"/>
+                </a:solidFill>
+                <a:latin typeface="Courier New" pitchFamily="34" charset="0"/>
+                <a:ea typeface="Courier New" pitchFamily="34" charset="-122"/>
+                <a:cs typeface="Courier New" pitchFamily="34" charset="-120"/>
+              </a:rPr>
+              <a:t>├── guards.yaml       refused, always</a:t>
+            </a:r>
+            <a:endParaRPr lang="en-US" sz="1300" dirty="0"/>
+          </a:p>
+          <a:p>
+            <a:pPr indent="0" marL="0">
+              <a:buNone/>
+            </a:pPr>
+            <a:r>
+              <a:rPr lang="en-US" sz="1300" dirty="0">
+                <a:solidFill>
+                  <a:srgbClr val="EEF3F9"/>
+                </a:solidFill>
+                <a:latin typeface="Courier New" pitchFamily="34" charset="0"/>
+                <a:ea typeface="Courier New" pitchFamily="34" charset="-122"/>
+                <a:cs typeface="Courier New" pitchFamily="34" charset="-120"/>
+              </a:rPr>
+              <a:t>├── rules.yaml</a:t>
+            </a:r>
+            <a:endParaRPr lang="en-US" sz="1300" dirty="0"/>
+          </a:p>
+          <a:p>
+            <a:pPr indent="0" marL="0">
+              <a:buNone/>
+            </a:pPr>
+            <a:r>
+              <a:rPr lang="en-US" sz="1300" dirty="0">
+                <a:solidFill>
+                  <a:srgbClr val="EEF3F9"/>
+                </a:solidFill>
+                <a:latin typeface="Courier New" pitchFamily="34" charset="0"/>
+                <a:ea typeface="Courier New" pitchFamily="34" charset="-122"/>
+                <a:cs typeface="Courier New" pitchFamily="34" charset="-120"/>
+              </a:rPr>
+              <a:t>└── permissions.yaml</a:t>
+            </a:r>
+            <a:endParaRPr lang="en-US" sz="1300" dirty="0"/>
           </a:p>
         </p:txBody>
       </p:sp>
@@ -13721,44 +14090,20 @@
         </p:nvSpPr>
         <p:spPr>
           <a:xfrm>
-            <a:off x="2743200" y="2240280"/>
-            <a:ext cx="548640" cy="0"/>
-          </a:xfrm>
-          <a:prstGeom prst="line">
-            <a:avLst/>
-          </a:prstGeom>
-          <a:noFill/>
-          <a:ln w="25400">
-            <a:solidFill>
-              <a:srgbClr val="8FA3B8"/>
-            </a:solidFill>
-            <a:prstDash val="solid"/>
-            <a:tailEnd type="triangle"/>
-          </a:ln>
-        </p:spPr>
-      </p:sp>
-      <p:sp>
-        <p:nvSpPr>
-          <p:cNvPr id="10" name="Shape 7"/>
-          <p:cNvSpPr/>
-          <p:nvPr/>
-        </p:nvSpPr>
-        <p:spPr>
-          <a:xfrm>
-            <a:off x="3383280" y="1645920"/>
-            <a:ext cx="2103120" cy="1188720"/>
+            <a:off x="5577840" y="1554480"/>
+            <a:ext cx="6035040" cy="3383280"/>
           </a:xfrm>
           <a:prstGeom prst="roundRect">
             <a:avLst>
-              <a:gd name="adj" fmla="val 9231"/>
+              <a:gd name="adj" fmla="val 3243"/>
             </a:avLst>
           </a:prstGeom>
           <a:solidFill>
-            <a:srgbClr val="13263B"/>
+            <a:srgbClr val="18304A"/>
           </a:solidFill>
           <a:ln w="12700">
             <a:solidFill>
-              <a:srgbClr val="13263B"/>
+              <a:srgbClr val="18304A"/>
             </a:solidFill>
             <a:prstDash val="solid"/>
           </a:ln>
@@ -13766,977 +14111,245 @@
       </p:sp>
       <p:sp>
         <p:nvSpPr>
-          <p:cNvPr id="11" name="Text 8"/>
-          <p:cNvSpPr txBox="1"/>
-          <p:nvPr/>
-        </p:nvSpPr>
-        <p:spPr>
-          <a:xfrm>
-            <a:off x="3611880" y="1810512"/>
-            <a:ext cx="1691640" cy="457200"/>
-          </a:xfrm>
-          <a:prstGeom prst="rect">
-            <a:avLst/>
-          </a:prstGeom>
-          <a:noFill/>
-          <a:ln/>
-        </p:spPr>
-        <p:txBody>
-          <a:bodyPr wrap="square" lIns="0" tIns="0" rIns="0" bIns="0" rtlCol="0" anchor="ctr"/>
-          <a:lstStyle/>
-          <a:p>
-            <a:pPr indent="0" marL="0">
-              <a:buNone/>
-            </a:pPr>
-            <a:r>
-              <a:rPr lang="en-US" sz="1700" b="1" dirty="0">
-                <a:solidFill>
-                  <a:srgbClr val="D4AF37"/>
-                </a:solidFill>
-                <a:latin typeface="Calibri" pitchFamily="34" charset="0"/>
-                <a:ea typeface="Calibri" pitchFamily="34" charset="-122"/>
-                <a:cs typeface="Calibri" pitchFamily="34" charset="-120"/>
-              </a:rPr>
-              <a:t>Gateway</a:t>
-            </a:r>
-            <a:endParaRPr lang="en-US" sz="1700" dirty="0"/>
-          </a:p>
-        </p:txBody>
-      </p:sp>
-      <p:sp>
-        <p:nvSpPr>
-          <p:cNvPr id="12" name="Shape 9"/>
-          <p:cNvSpPr/>
-          <p:nvPr/>
-        </p:nvSpPr>
-        <p:spPr>
-          <a:xfrm>
-            <a:off x="5577840" y="2240280"/>
-            <a:ext cx="548640" cy="0"/>
-          </a:xfrm>
-          <a:prstGeom prst="line">
-            <a:avLst/>
-          </a:prstGeom>
-          <a:noFill/>
-          <a:ln w="25400">
-            <a:solidFill>
-              <a:srgbClr val="8FA3B8"/>
-            </a:solidFill>
-            <a:prstDash val="solid"/>
-            <a:tailEnd type="triangle"/>
-          </a:ln>
-        </p:spPr>
-      </p:sp>
-      <p:sp>
-        <p:nvSpPr>
-          <p:cNvPr id="13" name="Text 10"/>
-          <p:cNvSpPr txBox="1"/>
-          <p:nvPr/>
-        </p:nvSpPr>
-        <p:spPr>
-          <a:xfrm>
-            <a:off x="6217920" y="1417320"/>
-            <a:ext cx="1828800" cy="274320"/>
-          </a:xfrm>
-          <a:prstGeom prst="rect">
-            <a:avLst/>
-          </a:prstGeom>
-          <a:noFill/>
-          <a:ln/>
-        </p:spPr>
-        <p:txBody>
-          <a:bodyPr wrap="square" lIns="0" tIns="0" rIns="0" bIns="0" rtlCol="0" anchor="ctr"/>
-          <a:lstStyle/>
-          <a:p>
-            <a:pPr indent="0" marL="0">
-              <a:buNone/>
-            </a:pPr>
-            <a:r>
-              <a:rPr lang="en-US" sz="1200" b="1" dirty="0">
-                <a:solidFill>
-                  <a:srgbClr val="8FA3B8"/>
-                </a:solidFill>
-                <a:latin typeface="Calibri" pitchFamily="34" charset="0"/>
-                <a:ea typeface="Calibri" pitchFamily="34" charset="-122"/>
-                <a:cs typeface="Calibri" pitchFamily="34" charset="-120"/>
-              </a:rPr>
-              <a:t>vLLM</a:t>
-            </a:r>
-            <a:endParaRPr lang="en-US" sz="1200" dirty="0"/>
-          </a:p>
-        </p:txBody>
-      </p:sp>
-      <p:sp>
-        <p:nvSpPr>
-          <p:cNvPr id="14" name="Shape 11"/>
-          <p:cNvSpPr/>
-          <p:nvPr/>
-        </p:nvSpPr>
-        <p:spPr>
-          <a:xfrm>
-            <a:off x="6217920" y="1737360"/>
-            <a:ext cx="1737360" cy="1051560"/>
-          </a:xfrm>
-          <a:prstGeom prst="roundRect">
-            <a:avLst>
-              <a:gd name="adj" fmla="val 8696"/>
-            </a:avLst>
-          </a:prstGeom>
-          <a:solidFill>
-            <a:srgbClr val="13263B"/>
-          </a:solidFill>
-          <a:ln w="19050">
-            <a:solidFill>
-              <a:srgbClr val="8E72E6"/>
-            </a:solidFill>
-            <a:prstDash val="solid"/>
-          </a:ln>
-        </p:spPr>
-      </p:sp>
-      <p:sp>
-        <p:nvSpPr>
-          <p:cNvPr id="15" name="Text 12"/>
-          <p:cNvSpPr txBox="1"/>
-          <p:nvPr/>
-        </p:nvSpPr>
-        <p:spPr>
-          <a:xfrm>
-            <a:off x="6217920" y="1783080"/>
-            <a:ext cx="1737360" cy="457200"/>
-          </a:xfrm>
-          <a:prstGeom prst="rect">
-            <a:avLst/>
-          </a:prstGeom>
-          <a:noFill/>
-          <a:ln/>
-        </p:spPr>
-        <p:txBody>
-          <a:bodyPr wrap="square" lIns="0" tIns="0" rIns="0" bIns="0" rtlCol="0" anchor="ctr"/>
-          <a:lstStyle/>
-          <a:p>
-            <a:pPr algn="ctr" indent="0" marL="0">
-              <a:buNone/>
-            </a:pPr>
-            <a:r>
-              <a:rPr lang="en-US" sz="1200" b="1" dirty="0">
-                <a:solidFill>
-                  <a:srgbClr val="EEF3F9"/>
+          <p:cNvPr id="10" name="Text 7"/>
+          <p:cNvSpPr txBox="1"/>
+          <p:nvPr/>
+        </p:nvSpPr>
+        <p:spPr>
+          <a:xfrm>
+            <a:off x="5806440" y="1737360"/>
+            <a:ext cx="5669280" cy="3108960"/>
+          </a:xfrm>
+          <a:prstGeom prst="rect">
+            <a:avLst/>
+          </a:prstGeom>
+          <a:noFill/>
+          <a:ln/>
+        </p:spPr>
+        <p:txBody>
+          <a:bodyPr wrap="square" lIns="0" tIns="0" rIns="0" bIns="0" rtlCol="0" anchor="t"/>
+          <a:lstStyle/>
+          <a:p>
+            <a:pPr indent="0" marL="0">
+              <a:buNone/>
+            </a:pPr>
+            <a:r>
+              <a:rPr lang="en-US" sz="1200" dirty="0">
+                <a:solidFill>
+                  <a:srgbClr val="5FBF7A"/>
                 </a:solidFill>
                 <a:latin typeface="Courier New" pitchFamily="34" charset="0"/>
                 <a:ea typeface="Courier New" pitchFamily="34" charset="-122"/>
                 <a:cs typeface="Courier New" pitchFamily="34" charset="-120"/>
               </a:rPr>
-              <a:t>muse-glimmer</a:t>
+              <a:t># registry.yaml</a:t>
             </a:r>
             <a:endParaRPr lang="en-US" sz="1200" dirty="0"/>
           </a:p>
-        </p:txBody>
-      </p:sp>
-      <p:sp>
-        <p:nvSpPr>
-          <p:cNvPr id="16" name="Text 13"/>
-          <p:cNvSpPr txBox="1"/>
-          <p:nvPr/>
-        </p:nvSpPr>
-        <p:spPr>
-          <a:xfrm>
-            <a:off x="6217920" y="2240280"/>
-            <a:ext cx="1737360" cy="457200"/>
-          </a:xfrm>
-          <a:prstGeom prst="rect">
-            <a:avLst/>
-          </a:prstGeom>
-          <a:noFill/>
-          <a:ln/>
-        </p:spPr>
-        <p:txBody>
-          <a:bodyPr wrap="square" lIns="0" tIns="0" rIns="0" bIns="0" rtlCol="0" anchor="ctr"/>
-          <a:lstStyle/>
-          <a:p>
-            <a:pPr algn="ctr" indent="0" marL="0">
-              <a:buNone/>
-            </a:pPr>
-            <a:r>
-              <a:rPr lang="en-US" sz="1100" dirty="0">
-                <a:solidFill>
-                  <a:srgbClr val="8FA3B8"/>
-                </a:solidFill>
-                <a:latin typeface="Calibri" pitchFamily="34" charset="0"/>
-                <a:ea typeface="Calibri" pitchFamily="34" charset="-122"/>
-                <a:cs typeface="Calibri" pitchFamily="34" charset="-120"/>
-              </a:rPr>
-              <a:t>analyste · lit</a:t>
-            </a:r>
-            <a:endParaRPr lang="en-US" sz="1100" dirty="0"/>
-          </a:p>
-        </p:txBody>
-      </p:sp>
-      <p:sp>
-        <p:nvSpPr>
-          <p:cNvPr id="17" name="Shape 14"/>
-          <p:cNvSpPr/>
-          <p:nvPr/>
-        </p:nvSpPr>
-        <p:spPr>
-          <a:xfrm>
-            <a:off x="8046720" y="1737360"/>
-            <a:ext cx="1737360" cy="1051560"/>
-          </a:xfrm>
-          <a:prstGeom prst="roundRect">
-            <a:avLst>
-              <a:gd name="adj" fmla="val 8696"/>
-            </a:avLst>
-          </a:prstGeom>
-          <a:solidFill>
-            <a:srgbClr val="13263B"/>
-          </a:solidFill>
-          <a:ln w="19050">
-            <a:solidFill>
-              <a:srgbClr val="8E72E6"/>
-            </a:solidFill>
-            <a:prstDash val="solid"/>
-          </a:ln>
-        </p:spPr>
-      </p:sp>
-      <p:sp>
-        <p:nvSpPr>
-          <p:cNvPr id="18" name="Text 15"/>
-          <p:cNvSpPr txBox="1"/>
-          <p:nvPr/>
-        </p:nvSpPr>
-        <p:spPr>
-          <a:xfrm>
-            <a:off x="8046720" y="1783080"/>
-            <a:ext cx="1737360" cy="457200"/>
-          </a:xfrm>
-          <a:prstGeom prst="rect">
-            <a:avLst/>
-          </a:prstGeom>
-          <a:noFill/>
-          <a:ln/>
-        </p:spPr>
-        <p:txBody>
-          <a:bodyPr wrap="square" lIns="0" tIns="0" rIns="0" bIns="0" rtlCol="0" anchor="ctr"/>
-          <a:lstStyle/>
-          <a:p>
-            <a:pPr algn="ctr" indent="0" marL="0">
-              <a:buNone/>
-            </a:pPr>
-            <a:r>
-              <a:rPr lang="en-US" sz="1200" b="1" dirty="0">
-                <a:solidFill>
-                  <a:srgbClr val="EEF3F9"/>
+          <a:p>
+            <a:pPr indent="0" marL="0">
+              <a:buNone/>
+            </a:pPr>
+            <a:r>
+              <a:rPr lang="en-US" sz="1200" dirty="0">
+                <a:solidFill>
+                  <a:srgbClr val="5FBF7A"/>
                 </a:solidFill>
                 <a:latin typeface="Courier New" pitchFamily="34" charset="0"/>
                 <a:ea typeface="Courier New" pitchFamily="34" charset="-122"/>
                 <a:cs typeface="Courier New" pitchFamily="34" charset="-120"/>
               </a:rPr>
-              <a:t>glm-5-3</a:t>
+              <a:t>models:</a:t>
             </a:r>
             <a:endParaRPr lang="en-US" sz="1200" dirty="0"/>
           </a:p>
-        </p:txBody>
-      </p:sp>
-      <p:sp>
-        <p:nvSpPr>
-          <p:cNvPr id="19" name="Text 16"/>
-          <p:cNvSpPr txBox="1"/>
-          <p:nvPr/>
-        </p:nvSpPr>
-        <p:spPr>
-          <a:xfrm>
-            <a:off x="8046720" y="2240280"/>
-            <a:ext cx="1737360" cy="457200"/>
-          </a:xfrm>
-          <a:prstGeom prst="rect">
-            <a:avLst/>
-          </a:prstGeom>
-          <a:noFill/>
-          <a:ln/>
-        </p:spPr>
-        <p:txBody>
-          <a:bodyPr wrap="square" lIns="0" tIns="0" rIns="0" bIns="0" rtlCol="0" anchor="ctr"/>
-          <a:lstStyle/>
-          <a:p>
-            <a:pPr algn="ctr" indent="0" marL="0">
-              <a:buNone/>
-            </a:pPr>
-            <a:r>
-              <a:rPr lang="en-US" sz="1100" dirty="0">
-                <a:solidFill>
-                  <a:srgbClr val="8FA3B8"/>
-                </a:solidFill>
-                <a:latin typeface="Calibri" pitchFamily="34" charset="0"/>
-                <a:ea typeface="Calibri" pitchFamily="34" charset="-122"/>
-                <a:cs typeface="Calibri" pitchFamily="34" charset="-120"/>
-              </a:rPr>
-              <a:t>juge · valide</a:t>
-            </a:r>
-            <a:endParaRPr lang="en-US" sz="1100" dirty="0"/>
-          </a:p>
-        </p:txBody>
-      </p:sp>
-      <p:sp>
-        <p:nvSpPr>
-          <p:cNvPr id="20" name="Shape 17"/>
-          <p:cNvSpPr/>
-          <p:nvPr/>
-        </p:nvSpPr>
-        <p:spPr>
-          <a:xfrm>
-            <a:off x="9875520" y="1737360"/>
-            <a:ext cx="1737360" cy="1051560"/>
-          </a:xfrm>
-          <a:prstGeom prst="roundRect">
-            <a:avLst>
-              <a:gd name="adj" fmla="val 8696"/>
-            </a:avLst>
-          </a:prstGeom>
-          <a:solidFill>
-            <a:srgbClr val="13263B"/>
-          </a:solidFill>
-          <a:ln w="19050">
-            <a:solidFill>
-              <a:srgbClr val="8E72E6"/>
-            </a:solidFill>
-            <a:prstDash val="solid"/>
-          </a:ln>
-        </p:spPr>
-      </p:sp>
-      <p:sp>
-        <p:nvSpPr>
-          <p:cNvPr id="21" name="Text 18"/>
-          <p:cNvSpPr txBox="1"/>
-          <p:nvPr/>
-        </p:nvSpPr>
-        <p:spPr>
-          <a:xfrm>
-            <a:off x="9875520" y="1783080"/>
-            <a:ext cx="1737360" cy="457200"/>
-          </a:xfrm>
-          <a:prstGeom prst="rect">
-            <a:avLst/>
-          </a:prstGeom>
-          <a:noFill/>
-          <a:ln/>
-        </p:spPr>
-        <p:txBody>
-          <a:bodyPr wrap="square" lIns="0" tIns="0" rIns="0" bIns="0" rtlCol="0" anchor="ctr"/>
-          <a:lstStyle/>
-          <a:p>
-            <a:pPr algn="ctr" indent="0" marL="0">
-              <a:buNone/>
-            </a:pPr>
-            <a:r>
-              <a:rPr lang="en-US" sz="1200" b="1" dirty="0">
-                <a:solidFill>
-                  <a:srgbClr val="EEF3F9"/>
+          <a:p>
+            <a:pPr indent="0" marL="0">
+              <a:buNone/>
+            </a:pPr>
+            <a:r>
+              <a:rPr lang="en-US" sz="1200" dirty="0">
+                <a:solidFill>
+                  <a:srgbClr val="5FBF7A"/>
                 </a:solidFill>
                 <a:latin typeface="Courier New" pitchFamily="34" charset="0"/>
                 <a:ea typeface="Courier New" pitchFamily="34" charset="-122"/>
                 <a:cs typeface="Courier New" pitchFamily="34" charset="-120"/>
               </a:rPr>
-              <a:t>kimi-k3</a:t>
+              <a:t>  gateway/muse-glimmer: { tier: 1 }</a:t>
             </a:r>
             <a:endParaRPr lang="en-US" sz="1200" dirty="0"/>
           </a:p>
-        </p:txBody>
-      </p:sp>
-      <p:sp>
-        <p:nvSpPr>
-          <p:cNvPr id="22" name="Text 19"/>
-          <p:cNvSpPr txBox="1"/>
-          <p:nvPr/>
-        </p:nvSpPr>
-        <p:spPr>
-          <a:xfrm>
-            <a:off x="9875520" y="2240280"/>
-            <a:ext cx="1737360" cy="457200"/>
-          </a:xfrm>
-          <a:prstGeom prst="rect">
-            <a:avLst/>
-          </a:prstGeom>
-          <a:noFill/>
-          <a:ln/>
-        </p:spPr>
-        <p:txBody>
-          <a:bodyPr wrap="square" lIns="0" tIns="0" rIns="0" bIns="0" rtlCol="0" anchor="ctr"/>
-          <a:lstStyle/>
-          <a:p>
-            <a:pPr algn="ctr" indent="0" marL="0">
-              <a:buNone/>
-            </a:pPr>
-            <a:r>
-              <a:rPr lang="en-US" sz="1100" dirty="0">
-                <a:solidFill>
-                  <a:srgbClr val="8FA3B8"/>
-                </a:solidFill>
-                <a:latin typeface="Calibri" pitchFamily="34" charset="0"/>
-                <a:ea typeface="Calibri" pitchFamily="34" charset="-122"/>
-                <a:cs typeface="Calibri" pitchFamily="34" charset="-120"/>
-              </a:rPr>
-              <a:t>rédacteur · session</a:t>
-            </a:r>
-            <a:endParaRPr lang="en-US" sz="1100" dirty="0"/>
-          </a:p>
-        </p:txBody>
-      </p:sp>
-      <p:sp>
-        <p:nvSpPr>
-          <p:cNvPr id="23" name="Shape 20"/>
+          <a:p>
+            <a:pPr indent="0" marL="0">
+              <a:buNone/>
+            </a:pPr>
+            <a:r>
+              <a:rPr lang="en-US" sz="1200" dirty="0">
+                <a:solidFill>
+                  <a:srgbClr val="5FBF7A"/>
+                </a:solidFill>
+                <a:latin typeface="Courier New" pitchFamily="34" charset="0"/>
+                <a:ea typeface="Courier New" pitchFamily="34" charset="-122"/>
+                <a:cs typeface="Courier New" pitchFamily="34" charset="-120"/>
+              </a:rPr>
+              <a:t>  gateway/glm-5-3:      { tier: 2 }</a:t>
+            </a:r>
+            <a:endParaRPr lang="en-US" sz="1200" dirty="0"/>
+          </a:p>
+          <a:p>
+            <a:pPr indent="0" marL="0">
+              <a:buNone/>
+            </a:pPr>
+            <a:r>
+              <a:rPr lang="en-US" sz="1200" dirty="0">
+                <a:solidFill>
+                  <a:srgbClr val="5FBF7A"/>
+                </a:solidFill>
+                <a:latin typeface="Courier New" pitchFamily="34" charset="0"/>
+                <a:ea typeface="Courier New" pitchFamily="34" charset="-122"/>
+                <a:cs typeface="Courier New" pitchFamily="34" charset="-120"/>
+              </a:rPr>
+              <a:t>  gateway/kimi-k3:      { tier: 3 }</a:t>
+            </a:r>
+            <a:endParaRPr lang="en-US" sz="1200" dirty="0"/>
+          </a:p>
+          <a:p>
+            <a:pPr indent="0" marL="0">
+              <a:buNone/>
+            </a:pPr>
+            <a:r>
+              <a:rPr lang="en-US" sz="1200" dirty="0">
+                <a:solidFill>
+                  <a:srgbClr val="5FBF7A"/>
+                </a:solidFill>
+                <a:latin typeface="Courier New" pitchFamily="34" charset="0"/>
+                <a:ea typeface="Courier New" pitchFamily="34" charset="-122"/>
+                <a:cs typeface="Courier New" pitchFamily="34" charset="-120"/>
+              </a:rPr>
+              <a:t>packages:</a:t>
+            </a:r>
+            <a:endParaRPr lang="en-US" sz="1200" dirty="0"/>
+          </a:p>
+          <a:p>
+            <a:pPr indent="0" marL="0">
+              <a:buNone/>
+            </a:pPr>
+            <a:r>
+              <a:rPr lang="en-US" sz="1200" dirty="0">
+                <a:solidFill>
+                  <a:srgbClr val="5FBF7A"/>
+                </a:solidFill>
+                <a:latin typeface="Courier New" pitchFamily="34" charset="0"/>
+                <a:ea typeface="Courier New" pitchFamily="34" charset="-122"/>
+                <a:cs typeface="Courier New" pitchFamily="34" charset="-120"/>
+              </a:rPr>
+              <a:t>  npm: https://artifactory…/npm-remote/</a:t>
+            </a:r>
+            <a:endParaRPr lang="en-US" sz="1200" dirty="0"/>
+          </a:p>
+          <a:p>
+            <a:pPr indent="0" marL="0">
+              <a:buNone/>
+            </a:pPr>
+            <a:r>
+              <a:rPr lang="en-US" sz="1200" dirty="0">
+                <a:solidFill>
+                  <a:srgbClr val="5FBF7A"/>
+                </a:solidFill>
+                <a:latin typeface="Courier New" pitchFamily="34" charset="0"/>
+                <a:ea typeface="Courier New" pitchFamily="34" charset="-122"/>
+                <a:cs typeface="Courier New" pitchFamily="34" charset="-120"/>
+              </a:rPr>
+              <a:t>  pip: https://artifactory…/pypi-remote/simple</a:t>
+            </a:r>
+            <a:endParaRPr lang="en-US" sz="1200" dirty="0"/>
+          </a:p>
+          <a:p>
+            <a:pPr indent="0" marL="0">
+              <a:buNone/>
+            </a:pPr>
+            <a:r>
+              <a:rPr lang="en-US" sz="1200" dirty="0">
+                <a:solidFill>
+                  <a:srgbClr val="5FBF7A"/>
+                </a:solidFill>
+                <a:latin typeface="Courier New" pitchFamily="34" charset="0"/>
+                <a:ea typeface="Courier New" pitchFamily="34" charset="-122"/>
+                <a:cs typeface="Courier New" pitchFamily="34" charset="-120"/>
+              </a:rPr>
+              <a:t>  auth: { tokenEnv: ARTIFACTORY_TOKEN }   # the name only</a:t>
+            </a:r>
+            <a:endParaRPr lang="en-US" sz="1200" dirty="0"/>
+          </a:p>
+          <a:p>
+            <a:pPr indent="0" marL="0">
+              <a:buNone/>
+            </a:pPr>
+            <a:r>
+              <a:rPr lang="en-US" sz="1200" dirty="0">
+                <a:solidFill>
+                  <a:srgbClr val="5FBF7A"/>
+                </a:solidFill>
+                <a:latin typeface="Courier New" pitchFamily="34" charset="0"/>
+                <a:ea typeface="Courier New" pitchFamily="34" charset="-122"/>
+                <a:cs typeface="Courier New" pitchFamily="34" charset="-120"/>
+              </a:rPr>
+              <a:t>  policy: private-only   # nothing from elsewhere</a:t>
+            </a:r>
+            <a:endParaRPr lang="en-US" sz="1200" dirty="0"/>
+          </a:p>
+          <a:p>
+            <a:pPr indent="0" marL="0">
+              <a:buNone/>
+            </a:pPr>
+            <a:r>
+              <a:rPr lang="en-US" sz="1200" dirty="0">
+                <a:solidFill>
+                  <a:srgbClr val="5FBF7A"/>
+                </a:solidFill>
+                <a:latin typeface="Courier New" pitchFamily="34" charset="0"/>
+                <a:ea typeface="Courier New" pitchFamily="34" charset="-122"/>
+                <a:cs typeface="Courier New" pitchFamily="34" charset="-120"/>
+              </a:rPr>
+              <a:t>containers:</a:t>
+            </a:r>
+            <a:endParaRPr lang="en-US" sz="1200" dirty="0"/>
+          </a:p>
+          <a:p>
+            <a:pPr indent="0" marL="0">
+              <a:buNone/>
+            </a:pPr>
+            <a:r>
+              <a:rPr lang="en-US" sz="1200" dirty="0">
+                <a:solidFill>
+                  <a:srgbClr val="5FBF7A"/>
+                </a:solidFill>
+                <a:latin typeface="Courier New" pitchFamily="34" charset="0"/>
+                <a:ea typeface="Courier New" pitchFamily="34" charset="-122"/>
+                <a:cs typeface="Courier New" pitchFamily="34" charset="-120"/>
+              </a:rPr>
+              <a:t>  image: montabouagina/kaginari:v0.3.0</a:t>
+            </a:r>
+            <a:endParaRPr lang="en-US" sz="1200" dirty="0"/>
+          </a:p>
+        </p:txBody>
+      </p:sp>
+      <p:sp>
+        <p:nvSpPr>
+          <p:cNvPr id="11" name="Shape 8"/>
           <p:cNvSpPr/>
           <p:nvPr/>
         </p:nvSpPr>
         <p:spPr>
           <a:xfrm>
-            <a:off x="548640" y="3246120"/>
-            <a:ext cx="2121408" cy="2697480"/>
+            <a:off x="5577840" y="5166360"/>
+            <a:ext cx="6035040" cy="384048"/>
           </a:xfrm>
           <a:prstGeom prst="roundRect">
             <a:avLst>
-              <a:gd name="adj" fmla="val 5172"/>
+              <a:gd name="adj" fmla="val 50000"/>
             </a:avLst>
-          </a:prstGeom>
-          <a:solidFill>
-            <a:srgbClr val="13263B"/>
-          </a:solidFill>
-          <a:ln w="12700">
-            <a:solidFill>
-              <a:srgbClr val="13263B"/>
-            </a:solidFill>
-            <a:prstDash val="solid"/>
-          </a:ln>
-        </p:spPr>
-      </p:sp>
-      <p:sp>
-        <p:nvSpPr>
-          <p:cNvPr id="24" name="Shape 21"/>
-          <p:cNvSpPr/>
-          <p:nvPr/>
-        </p:nvSpPr>
-        <p:spPr>
-          <a:xfrm>
-            <a:off x="731520" y="3429000"/>
-            <a:ext cx="411480" cy="411480"/>
-          </a:xfrm>
-          <a:prstGeom prst="ellipse">
-            <a:avLst/>
-          </a:prstGeom>
-          <a:solidFill>
-            <a:srgbClr val="2BA3C7"/>
-          </a:solidFill>
-          <a:ln w="12700">
-            <a:solidFill>
-              <a:srgbClr val="2BA3C7"/>
-            </a:solidFill>
-            <a:prstDash val="solid"/>
-          </a:ln>
-        </p:spPr>
-      </p:sp>
-      <p:sp>
-        <p:nvSpPr>
-          <p:cNvPr id="25" name="Text 22"/>
-          <p:cNvSpPr txBox="1"/>
-          <p:nvPr/>
-        </p:nvSpPr>
-        <p:spPr>
-          <a:xfrm>
-            <a:off x="731520" y="3429000"/>
-            <a:ext cx="411480" cy="411480"/>
-          </a:xfrm>
-          <a:prstGeom prst="rect">
-            <a:avLst/>
-          </a:prstGeom>
-          <a:noFill/>
-          <a:ln/>
-        </p:spPr>
-        <p:txBody>
-          <a:bodyPr wrap="square" lIns="0" tIns="0" rIns="0" bIns="0" rtlCol="0" anchor="ctr"/>
-          <a:lstStyle/>
-          <a:p>
-            <a:pPr algn="ctr" indent="0" marL="0">
-              <a:buNone/>
-            </a:pPr>
-            <a:r>
-              <a:rPr lang="en-US" sz="1500" b="1" dirty="0">
-                <a:solidFill>
-                  <a:srgbClr val="0B1A2B"/>
-                </a:solidFill>
-                <a:latin typeface="Cambria" pitchFamily="34" charset="0"/>
-                <a:ea typeface="Cambria" pitchFamily="34" charset="-122"/>
-                <a:cs typeface="Cambria" pitchFamily="34" charset="-120"/>
-              </a:rPr>
-              <a:t>1</a:t>
-            </a:r>
-            <a:endParaRPr lang="en-US" sz="1500" dirty="0"/>
-          </a:p>
-        </p:txBody>
-      </p:sp>
-      <p:sp>
-        <p:nvSpPr>
-          <p:cNvPr id="26" name="Text 23"/>
-          <p:cNvSpPr txBox="1"/>
-          <p:nvPr/>
-        </p:nvSpPr>
-        <p:spPr>
-          <a:xfrm>
-            <a:off x="1280160" y="3410712"/>
-            <a:ext cx="1207008" cy="457200"/>
-          </a:xfrm>
-          <a:prstGeom prst="rect">
-            <a:avLst/>
-          </a:prstGeom>
-          <a:noFill/>
-          <a:ln/>
-        </p:spPr>
-        <p:txBody>
-          <a:bodyPr wrap="square" lIns="0" tIns="0" rIns="0" bIns="0" rtlCol="0" anchor="ctr"/>
-          <a:lstStyle/>
-          <a:p>
-            <a:pPr indent="0" marL="0">
-              <a:buNone/>
-            </a:pPr>
-            <a:r>
-              <a:rPr lang="en-US" sz="1500" b="1" dirty="0">
-                <a:solidFill>
-                  <a:srgbClr val="2BA3C7"/>
-                </a:solidFill>
-                <a:latin typeface="Calibri" pitchFamily="34" charset="0"/>
-                <a:ea typeface="Calibri" pitchFamily="34" charset="-122"/>
-                <a:cs typeface="Calibri" pitchFamily="34" charset="-120"/>
-              </a:rPr>
-              <a:t>status</a:t>
-            </a:r>
-            <a:endParaRPr lang="en-US" sz="1500" dirty="0"/>
-          </a:p>
-        </p:txBody>
-      </p:sp>
-      <p:sp>
-        <p:nvSpPr>
-          <p:cNvPr id="27" name="Text 24"/>
-          <p:cNvSpPr txBox="1"/>
-          <p:nvPr/>
-        </p:nvSpPr>
-        <p:spPr>
-          <a:xfrm>
-            <a:off x="777240" y="3931920"/>
-            <a:ext cx="1664208" cy="1874520"/>
-          </a:xfrm>
-          <a:prstGeom prst="rect">
-            <a:avLst/>
-          </a:prstGeom>
-          <a:noFill/>
-          <a:ln/>
-        </p:spPr>
-        <p:txBody>
-          <a:bodyPr wrap="square" lIns="0" tIns="0" rIns="0" bIns="0" rtlCol="0" anchor="t"/>
-          <a:lstStyle/>
-          <a:p>
-            <a:pPr indent="0" marL="0">
-              <a:spcAft>
-                <a:spcPts val="400"/>
-              </a:spcAft>
-              <a:buNone/>
-            </a:pPr>
-            <a:r>
-              <a:rPr lang="en-US" sz="1300" dirty="0">
-                <a:solidFill>
-                  <a:srgbClr val="EEF3F9"/>
-                </a:solidFill>
-                <a:latin typeface="Calibri" pitchFamily="34" charset="0"/>
-                <a:ea typeface="Calibri" pitchFamily="34" charset="-122"/>
-                <a:cs typeface="Calibri" pitchFamily="34" charset="-120"/>
-              </a:rPr>
-              <a:t>chaque modèle résolu, avec son fichier</a:t>
-            </a:r>
-            <a:endParaRPr lang="en-US" sz="1300" dirty="0"/>
-          </a:p>
-        </p:txBody>
-      </p:sp>
-      <p:sp>
-        <p:nvSpPr>
-          <p:cNvPr id="28" name="Shape 25"/>
-          <p:cNvSpPr/>
-          <p:nvPr/>
-        </p:nvSpPr>
-        <p:spPr>
-          <a:xfrm>
-            <a:off x="2807208" y="3246120"/>
-            <a:ext cx="2121408" cy="2697480"/>
-          </a:xfrm>
-          <a:prstGeom prst="roundRect">
-            <a:avLst>
-              <a:gd name="adj" fmla="val 5172"/>
-            </a:avLst>
-          </a:prstGeom>
-          <a:solidFill>
-            <a:srgbClr val="13263B"/>
-          </a:solidFill>
-          <a:ln w="12700">
-            <a:solidFill>
-              <a:srgbClr val="13263B"/>
-            </a:solidFill>
-            <a:prstDash val="solid"/>
-          </a:ln>
-        </p:spPr>
-      </p:sp>
-      <p:sp>
-        <p:nvSpPr>
-          <p:cNvPr id="29" name="Shape 26"/>
-          <p:cNvSpPr/>
-          <p:nvPr/>
-        </p:nvSpPr>
-        <p:spPr>
-          <a:xfrm>
-            <a:off x="2990088" y="3429000"/>
-            <a:ext cx="411480" cy="411480"/>
-          </a:xfrm>
-          <a:prstGeom prst="ellipse">
-            <a:avLst/>
-          </a:prstGeom>
-          <a:solidFill>
-            <a:srgbClr val="5FBF7A"/>
-          </a:solidFill>
-          <a:ln w="12700">
-            <a:solidFill>
-              <a:srgbClr val="5FBF7A"/>
-            </a:solidFill>
-            <a:prstDash val="solid"/>
-          </a:ln>
-        </p:spPr>
-      </p:sp>
-      <p:sp>
-        <p:nvSpPr>
-          <p:cNvPr id="30" name="Text 27"/>
-          <p:cNvSpPr txBox="1"/>
-          <p:nvPr/>
-        </p:nvSpPr>
-        <p:spPr>
-          <a:xfrm>
-            <a:off x="2990088" y="3429000"/>
-            <a:ext cx="411480" cy="411480"/>
-          </a:xfrm>
-          <a:prstGeom prst="rect">
-            <a:avLst/>
-          </a:prstGeom>
-          <a:noFill/>
-          <a:ln/>
-        </p:spPr>
-        <p:txBody>
-          <a:bodyPr wrap="square" lIns="0" tIns="0" rIns="0" bIns="0" rtlCol="0" anchor="ctr"/>
-          <a:lstStyle/>
-          <a:p>
-            <a:pPr algn="ctr" indent="0" marL="0">
-              <a:buNone/>
-            </a:pPr>
-            <a:r>
-              <a:rPr lang="en-US" sz="1500" b="1" dirty="0">
-                <a:solidFill>
-                  <a:srgbClr val="0B1A2B"/>
-                </a:solidFill>
-                <a:latin typeface="Cambria" pitchFamily="34" charset="0"/>
-                <a:ea typeface="Cambria" pitchFamily="34" charset="-122"/>
-                <a:cs typeface="Cambria" pitchFamily="34" charset="-120"/>
-              </a:rPr>
-              <a:t>2</a:t>
-            </a:r>
-            <a:endParaRPr lang="en-US" sz="1500" dirty="0"/>
-          </a:p>
-        </p:txBody>
-      </p:sp>
-      <p:sp>
-        <p:nvSpPr>
-          <p:cNvPr id="31" name="Text 28"/>
-          <p:cNvSpPr txBox="1"/>
-          <p:nvPr/>
-        </p:nvSpPr>
-        <p:spPr>
-          <a:xfrm>
-            <a:off x="3538728" y="3410712"/>
-            <a:ext cx="1207008" cy="457200"/>
-          </a:xfrm>
-          <a:prstGeom prst="rect">
-            <a:avLst/>
-          </a:prstGeom>
-          <a:noFill/>
-          <a:ln/>
-        </p:spPr>
-        <p:txBody>
-          <a:bodyPr wrap="square" lIns="0" tIns="0" rIns="0" bIns="0" rtlCol="0" anchor="ctr"/>
-          <a:lstStyle/>
-          <a:p>
-            <a:pPr indent="0" marL="0">
-              <a:buNone/>
-            </a:pPr>
-            <a:r>
-              <a:rPr lang="en-US" sz="1500" b="1" dirty="0">
-                <a:solidFill>
-                  <a:srgbClr val="5FBF7A"/>
-                </a:solidFill>
-                <a:latin typeface="Calibri" pitchFamily="34" charset="0"/>
-                <a:ea typeface="Calibri" pitchFamily="34" charset="-122"/>
-                <a:cs typeface="Calibri" pitchFamily="34" charset="-120"/>
-              </a:rPr>
-              <a:t>Une vraie tâche</a:t>
-            </a:r>
-            <a:endParaRPr lang="en-US" sz="1500" dirty="0"/>
-          </a:p>
-        </p:txBody>
-      </p:sp>
-      <p:sp>
-        <p:nvSpPr>
-          <p:cNvPr id="32" name="Text 29"/>
-          <p:cNvSpPr txBox="1"/>
-          <p:nvPr/>
-        </p:nvSpPr>
-        <p:spPr>
-          <a:xfrm>
-            <a:off x="3035808" y="3931920"/>
-            <a:ext cx="1664208" cy="1874520"/>
-          </a:xfrm>
-          <a:prstGeom prst="rect">
-            <a:avLst/>
-          </a:prstGeom>
-          <a:noFill/>
-          <a:ln/>
-        </p:spPr>
-        <p:txBody>
-          <a:bodyPr wrap="square" lIns="0" tIns="0" rIns="0" bIns="0" rtlCol="0" anchor="t"/>
-          <a:lstStyle/>
-          <a:p>
-            <a:pPr indent="0" marL="0">
-              <a:spcAft>
-                <a:spcPts val="400"/>
-              </a:spcAft>
-              <a:buNone/>
-            </a:pPr>
-            <a:r>
-              <a:rPr lang="en-US" sz="1300" dirty="0">
-                <a:solidFill>
-                  <a:srgbClr val="EEF3F9"/>
-                </a:solidFill>
-                <a:latin typeface="Calibri" pitchFamily="34" charset="0"/>
-                <a:ea typeface="Calibri" pitchFamily="34" charset="-122"/>
-                <a:cs typeface="Calibri" pitchFamily="34" charset="-120"/>
-              </a:rPr>
-              <a:t>la réflexion en direct ; outils en cartes ; diffs</a:t>
-            </a:r>
-            <a:endParaRPr lang="en-US" sz="1300" dirty="0"/>
-          </a:p>
-        </p:txBody>
-      </p:sp>
-      <p:sp>
-        <p:nvSpPr>
-          <p:cNvPr id="33" name="Shape 30"/>
-          <p:cNvSpPr/>
-          <p:nvPr/>
-        </p:nvSpPr>
-        <p:spPr>
-          <a:xfrm>
-            <a:off x="5065776" y="3246120"/>
-            <a:ext cx="2121408" cy="2697480"/>
-          </a:xfrm>
-          <a:prstGeom prst="roundRect">
-            <a:avLst>
-              <a:gd name="adj" fmla="val 5172"/>
-            </a:avLst>
-          </a:prstGeom>
-          <a:solidFill>
-            <a:srgbClr val="13263B"/>
-          </a:solidFill>
-          <a:ln w="12700">
-            <a:solidFill>
-              <a:srgbClr val="13263B"/>
-            </a:solidFill>
-            <a:prstDash val="solid"/>
-          </a:ln>
-        </p:spPr>
-      </p:sp>
-      <p:sp>
-        <p:nvSpPr>
-          <p:cNvPr id="34" name="Shape 31"/>
-          <p:cNvSpPr/>
-          <p:nvPr/>
-        </p:nvSpPr>
-        <p:spPr>
-          <a:xfrm>
-            <a:off x="5248656" y="3429000"/>
-            <a:ext cx="411480" cy="411480"/>
-          </a:xfrm>
-          <a:prstGeom prst="ellipse">
-            <a:avLst/>
-          </a:prstGeom>
-          <a:solidFill>
-            <a:srgbClr val="8E72E6"/>
-          </a:solidFill>
-          <a:ln w="12700">
-            <a:solidFill>
-              <a:srgbClr val="8E72E6"/>
-            </a:solidFill>
-            <a:prstDash val="solid"/>
-          </a:ln>
-        </p:spPr>
-      </p:sp>
-      <p:sp>
-        <p:nvSpPr>
-          <p:cNvPr id="35" name="Text 32"/>
-          <p:cNvSpPr txBox="1"/>
-          <p:nvPr/>
-        </p:nvSpPr>
-        <p:spPr>
-          <a:xfrm>
-            <a:off x="5248656" y="3429000"/>
-            <a:ext cx="411480" cy="411480"/>
-          </a:xfrm>
-          <a:prstGeom prst="rect">
-            <a:avLst/>
-          </a:prstGeom>
-          <a:noFill/>
-          <a:ln/>
-        </p:spPr>
-        <p:txBody>
-          <a:bodyPr wrap="square" lIns="0" tIns="0" rIns="0" bIns="0" rtlCol="0" anchor="ctr"/>
-          <a:lstStyle/>
-          <a:p>
-            <a:pPr algn="ctr" indent="0" marL="0">
-              <a:buNone/>
-            </a:pPr>
-            <a:r>
-              <a:rPr lang="en-US" sz="1500" b="1" dirty="0">
-                <a:solidFill>
-                  <a:srgbClr val="0B1A2B"/>
-                </a:solidFill>
-                <a:latin typeface="Cambria" pitchFamily="34" charset="0"/>
-                <a:ea typeface="Cambria" pitchFamily="34" charset="-122"/>
-                <a:cs typeface="Cambria" pitchFamily="34" charset="-120"/>
-              </a:rPr>
-              <a:t>3</a:t>
-            </a:r>
-            <a:endParaRPr lang="en-US" sz="1500" dirty="0"/>
-          </a:p>
-        </p:txBody>
-      </p:sp>
-      <p:sp>
-        <p:nvSpPr>
-          <p:cNvPr id="36" name="Text 33"/>
-          <p:cNvSpPr txBox="1"/>
-          <p:nvPr/>
-        </p:nvSpPr>
-        <p:spPr>
-          <a:xfrm>
-            <a:off x="5797296" y="3410712"/>
-            <a:ext cx="1207008" cy="457200"/>
-          </a:xfrm>
-          <a:prstGeom prst="rect">
-            <a:avLst/>
-          </a:prstGeom>
-          <a:noFill/>
-          <a:ln/>
-        </p:spPr>
-        <p:txBody>
-          <a:bodyPr wrap="square" lIns="0" tIns="0" rIns="0" bIns="0" rtlCol="0" anchor="ctr"/>
-          <a:lstStyle/>
-          <a:p>
-            <a:pPr indent="0" marL="0">
-              <a:buNone/>
-            </a:pPr>
-            <a:r>
-              <a:rPr lang="en-US" sz="1500" b="1" dirty="0">
-                <a:solidFill>
-                  <a:srgbClr val="8E72E6"/>
-                </a:solidFill>
-                <a:latin typeface="Calibri" pitchFamily="34" charset="0"/>
-                <a:ea typeface="Calibri" pitchFamily="34" charset="-122"/>
-                <a:cs typeface="Calibri" pitchFamily="34" charset="-120"/>
-              </a:rPr>
-              <a:t>Un sous-agent</a:t>
-            </a:r>
-            <a:endParaRPr lang="en-US" sz="1500" dirty="0"/>
-          </a:p>
-        </p:txBody>
-      </p:sp>
-      <p:sp>
-        <p:nvSpPr>
-          <p:cNvPr id="37" name="Text 34"/>
-          <p:cNvSpPr txBox="1"/>
-          <p:nvPr/>
-        </p:nvSpPr>
-        <p:spPr>
-          <a:xfrm>
-            <a:off x="5294376" y="3931920"/>
-            <a:ext cx="1664208" cy="1874520"/>
-          </a:xfrm>
-          <a:prstGeom prst="rect">
-            <a:avLst/>
-          </a:prstGeom>
-          <a:noFill/>
-          <a:ln/>
-        </p:spPr>
-        <p:txBody>
-          <a:bodyPr wrap="square" lIns="0" tIns="0" rIns="0" bIns="0" rtlCol="0" anchor="t"/>
-          <a:lstStyle/>
-          <a:p>
-            <a:pPr indent="0" marL="0">
-              <a:spcAft>
-                <a:spcPts val="400"/>
-              </a:spcAft>
-              <a:buNone/>
-            </a:pPr>
-            <a:r>
-              <a:rPr lang="en-US" sz="1300" dirty="0">
-                <a:solidFill>
-                  <a:srgbClr val="EEF3F9"/>
-                </a:solidFill>
-                <a:latin typeface="Calibri" pitchFamily="34" charset="0"/>
-                <a:ea typeface="Calibri" pitchFamily="34" charset="-122"/>
-                <a:cs typeface="Calibri" pitchFamily="34" charset="-120"/>
-              </a:rPr>
-              <a:t>ctrl+t — le suivre</a:t>
-            </a:r>
-            <a:endParaRPr lang="en-US" sz="1300" dirty="0"/>
-          </a:p>
-        </p:txBody>
-      </p:sp>
-      <p:sp>
-        <p:nvSpPr>
-          <p:cNvPr id="38" name="Shape 35"/>
-          <p:cNvSpPr/>
-          <p:nvPr/>
-        </p:nvSpPr>
-        <p:spPr>
-          <a:xfrm>
-            <a:off x="7324344" y="3246120"/>
-            <a:ext cx="2121408" cy="2697480"/>
-          </a:xfrm>
-          <a:prstGeom prst="roundRect">
-            <a:avLst>
-              <a:gd name="adj" fmla="val 5172"/>
-            </a:avLst>
-          </a:prstGeom>
-          <a:solidFill>
-            <a:srgbClr val="13263B"/>
-          </a:solidFill>
-          <a:ln w="12700">
-            <a:solidFill>
-              <a:srgbClr val="13263B"/>
-            </a:solidFill>
-            <a:prstDash val="solid"/>
-          </a:ln>
-        </p:spPr>
-      </p:sp>
-      <p:sp>
-        <p:nvSpPr>
-          <p:cNvPr id="39" name="Shape 36"/>
-          <p:cNvSpPr/>
-          <p:nvPr/>
-        </p:nvSpPr>
-        <p:spPr>
-          <a:xfrm>
-            <a:off x="7507224" y="3429000"/>
-            <a:ext cx="411480" cy="411480"/>
-          </a:xfrm>
-          <a:prstGeom prst="ellipse">
-            <a:avLst/>
           </a:prstGeom>
           <a:solidFill>
             <a:srgbClr val="D4AF37"/>
@@ -14751,14 +14364,14 @@
       </p:sp>
       <p:sp>
         <p:nvSpPr>
-          <p:cNvPr id="40" name="Text 37"/>
-          <p:cNvSpPr txBox="1"/>
-          <p:nvPr/>
-        </p:nvSpPr>
-        <p:spPr>
-          <a:xfrm>
-            <a:off x="7507224" y="3429000"/>
-            <a:ext cx="411480" cy="411480"/>
+          <p:cNvPr id="12" name="Text 9"/>
+          <p:cNvSpPr txBox="1"/>
+          <p:nvPr/>
+        </p:nvSpPr>
+        <p:spPr>
+          <a:xfrm>
+            <a:off x="5577840" y="5166360"/>
+            <a:ext cx="6035040" cy="384048"/>
           </a:xfrm>
           <a:prstGeom prst="rect">
             <a:avLst/>
@@ -14774,268 +14387,15 @@
               <a:buNone/>
             </a:pPr>
             <a:r>
-              <a:rPr lang="en-US" sz="1500" b="1" dirty="0">
+              <a:rPr lang="en-US" sz="1300" b="1" dirty="0">
                 <a:solidFill>
                   <a:srgbClr val="0B1A2B"/>
                 </a:solidFill>
-                <a:latin typeface="Cambria" pitchFamily="34" charset="0"/>
-                <a:ea typeface="Cambria" pitchFamily="34" charset="-122"/>
-                <a:cs typeface="Cambria" pitchFamily="34" charset="-120"/>
-              </a:rPr>
-              <a:t>4</a:t>
-            </a:r>
-            <a:endParaRPr lang="en-US" sz="1500" dirty="0"/>
-          </a:p>
-        </p:txBody>
-      </p:sp>
-      <p:sp>
-        <p:nvSpPr>
-          <p:cNvPr id="41" name="Text 38"/>
-          <p:cNvSpPr txBox="1"/>
-          <p:nvPr/>
-        </p:nvSpPr>
-        <p:spPr>
-          <a:xfrm>
-            <a:off x="8055864" y="3410712"/>
-            <a:ext cx="1207008" cy="457200"/>
-          </a:xfrm>
-          <a:prstGeom prst="rect">
-            <a:avLst/>
-          </a:prstGeom>
-          <a:noFill/>
-          <a:ln/>
-        </p:spPr>
-        <p:txBody>
-          <a:bodyPr wrap="square" lIns="0" tIns="0" rIns="0" bIns="0" rtlCol="0" anchor="ctr"/>
-          <a:lstStyle/>
-          <a:p>
-            <a:pPr indent="0" marL="0">
-              <a:buNone/>
-            </a:pPr>
-            <a:r>
-              <a:rPr lang="en-US" sz="1500" b="1" dirty="0">
-                <a:solidFill>
-                  <a:srgbClr val="D4AF37"/>
-                </a:solidFill>
-                <a:latin typeface="Calibri" pitchFamily="34" charset="0"/>
-                <a:ea typeface="Calibri" pitchFamily="34" charset="-122"/>
-                <a:cs typeface="Calibri" pitchFamily="34" charset="-120"/>
-              </a:rPr>
-              <a:t>La validation</a:t>
-            </a:r>
-            <a:endParaRPr lang="en-US" sz="1500" dirty="0"/>
-          </a:p>
-        </p:txBody>
-      </p:sp>
-      <p:sp>
-        <p:nvSpPr>
-          <p:cNvPr id="42" name="Text 39"/>
-          <p:cNvSpPr txBox="1"/>
-          <p:nvPr/>
-        </p:nvSpPr>
-        <p:spPr>
-          <a:xfrm>
-            <a:off x="7552944" y="3931920"/>
-            <a:ext cx="1664208" cy="1874520"/>
-          </a:xfrm>
-          <a:prstGeom prst="rect">
-            <a:avLst/>
-          </a:prstGeom>
-          <a:noFill/>
-          <a:ln/>
-        </p:spPr>
-        <p:txBody>
-          <a:bodyPr wrap="square" lIns="0" tIns="0" rIns="0" bIns="0" rtlCol="0" anchor="t"/>
-          <a:lstStyle/>
-          <a:p>
-            <a:pPr indent="0" marL="0">
-              <a:spcAft>
-                <a:spcPts val="400"/>
-              </a:spcAft>
-              <a:buNone/>
-            </a:pPr>
-            <a:r>
-              <a:rPr lang="en-US" sz="1300" dirty="0">
-                <a:solidFill>
-                  <a:srgbClr val="EEF3F9"/>
-                </a:solidFill>
-                <a:latin typeface="Calibri" pitchFamily="34" charset="0"/>
-                <a:ea typeface="Calibri" pitchFamily="34" charset="-122"/>
-                <a:cs typeface="Calibri" pitchFamily="34" charset="-120"/>
-              </a:rPr>
-              <a:t>le verdict du propriétaire, consigné</a:t>
-            </a:r>
-            <a:endParaRPr lang="en-US" sz="1300" dirty="0"/>
-          </a:p>
-        </p:txBody>
-      </p:sp>
-      <p:sp>
-        <p:nvSpPr>
-          <p:cNvPr id="43" name="Shape 40"/>
-          <p:cNvSpPr/>
-          <p:nvPr/>
-        </p:nvSpPr>
-        <p:spPr>
-          <a:xfrm>
-            <a:off x="9582912" y="3246120"/>
-            <a:ext cx="2121408" cy="2697480"/>
-          </a:xfrm>
-          <a:prstGeom prst="roundRect">
-            <a:avLst>
-              <a:gd name="adj" fmla="val 5172"/>
-            </a:avLst>
-          </a:prstGeom>
-          <a:solidFill>
-            <a:srgbClr val="13263B"/>
-          </a:solidFill>
-          <a:ln w="12700">
-            <a:solidFill>
-              <a:srgbClr val="13263B"/>
-            </a:solidFill>
-            <a:prstDash val="solid"/>
-          </a:ln>
-        </p:spPr>
-      </p:sp>
-      <p:sp>
-        <p:nvSpPr>
-          <p:cNvPr id="44" name="Shape 41"/>
-          <p:cNvSpPr/>
-          <p:nvPr/>
-        </p:nvSpPr>
-        <p:spPr>
-          <a:xfrm>
-            <a:off x="9765792" y="3429000"/>
-            <a:ext cx="411480" cy="411480"/>
-          </a:xfrm>
-          <a:prstGeom prst="ellipse">
-            <a:avLst/>
-          </a:prstGeom>
-          <a:solidFill>
-            <a:srgbClr val="E0645A"/>
-          </a:solidFill>
-          <a:ln w="12700">
-            <a:solidFill>
-              <a:srgbClr val="E0645A"/>
-            </a:solidFill>
-            <a:prstDash val="solid"/>
-          </a:ln>
-        </p:spPr>
-      </p:sp>
-      <p:sp>
-        <p:nvSpPr>
-          <p:cNvPr id="45" name="Text 42"/>
-          <p:cNvSpPr txBox="1"/>
-          <p:nvPr/>
-        </p:nvSpPr>
-        <p:spPr>
-          <a:xfrm>
-            <a:off x="9765792" y="3429000"/>
-            <a:ext cx="411480" cy="411480"/>
-          </a:xfrm>
-          <a:prstGeom prst="rect">
-            <a:avLst/>
-          </a:prstGeom>
-          <a:noFill/>
-          <a:ln/>
-        </p:spPr>
-        <p:txBody>
-          <a:bodyPr wrap="square" lIns="0" tIns="0" rIns="0" bIns="0" rtlCol="0" anchor="ctr"/>
-          <a:lstStyle/>
-          <a:p>
-            <a:pPr algn="ctr" indent="0" marL="0">
-              <a:buNone/>
-            </a:pPr>
-            <a:r>
-              <a:rPr lang="en-US" sz="1500" b="1" dirty="0">
-                <a:solidFill>
-                  <a:srgbClr val="0B1A2B"/>
-                </a:solidFill>
-                <a:latin typeface="Cambria" pitchFamily="34" charset="0"/>
-                <a:ea typeface="Cambria" pitchFamily="34" charset="-122"/>
-                <a:cs typeface="Cambria" pitchFamily="34" charset="-120"/>
-              </a:rPr>
-              <a:t>5</a:t>
-            </a:r>
-            <a:endParaRPr lang="en-US" sz="1500" dirty="0"/>
-          </a:p>
-        </p:txBody>
-      </p:sp>
-      <p:sp>
-        <p:nvSpPr>
-          <p:cNvPr id="46" name="Text 43"/>
-          <p:cNvSpPr txBox="1"/>
-          <p:nvPr/>
-        </p:nvSpPr>
-        <p:spPr>
-          <a:xfrm>
-            <a:off x="10314432" y="3410712"/>
-            <a:ext cx="1207008" cy="457200"/>
-          </a:xfrm>
-          <a:prstGeom prst="rect">
-            <a:avLst/>
-          </a:prstGeom>
-          <a:noFill/>
-          <a:ln/>
-        </p:spPr>
-        <p:txBody>
-          <a:bodyPr wrap="square" lIns="0" tIns="0" rIns="0" bIns="0" rtlCol="0" anchor="ctr"/>
-          <a:lstStyle/>
-          <a:p>
-            <a:pPr indent="0" marL="0">
-              <a:buNone/>
-            </a:pPr>
-            <a:r>
-              <a:rPr lang="en-US" sz="1500" b="1" dirty="0">
-                <a:solidFill>
-                  <a:srgbClr val="E0645A"/>
-                </a:solidFill>
-                <a:latin typeface="Calibri" pitchFamily="34" charset="0"/>
-                <a:ea typeface="Calibri" pitchFamily="34" charset="-122"/>
-                <a:cs typeface="Calibri" pitchFamily="34" charset="-120"/>
-              </a:rPr>
-              <a:t>Le guard</a:t>
-            </a:r>
-            <a:endParaRPr lang="en-US" sz="1500" dirty="0"/>
-          </a:p>
-        </p:txBody>
-      </p:sp>
-      <p:sp>
-        <p:nvSpPr>
-          <p:cNvPr id="47" name="Text 44"/>
-          <p:cNvSpPr txBox="1"/>
-          <p:nvPr/>
-        </p:nvSpPr>
-        <p:spPr>
-          <a:xfrm>
-            <a:off x="9811512" y="3931920"/>
-            <a:ext cx="1664208" cy="1874520"/>
-          </a:xfrm>
-          <a:prstGeom prst="rect">
-            <a:avLst/>
-          </a:prstGeom>
-          <a:noFill/>
-          <a:ln/>
-        </p:spPr>
-        <p:txBody>
-          <a:bodyPr wrap="square" lIns="0" tIns="0" rIns="0" bIns="0" rtlCol="0" anchor="t"/>
-          <a:lstStyle/>
-          <a:p>
-            <a:pPr indent="0" marL="0">
-              <a:spcAft>
-                <a:spcPts val="400"/>
-              </a:spcAft>
-              <a:buNone/>
-            </a:pPr>
-            <a:r>
-              <a:rPr lang="en-US" sz="1300" dirty="0">
-                <a:solidFill>
-                  <a:srgbClr val="EEF3F9"/>
-                </a:solidFill>
-                <a:latin typeface="Calibri" pitchFamily="34" charset="0"/>
-                <a:ea typeface="Calibri" pitchFamily="34" charset="-122"/>
-                <a:cs typeface="Calibri" pitchFamily="34" charset="-120"/>
-              </a:rPr>
-              <a:t>« supprime ~ » — refusé avant toute question</a:t>
+                <a:latin typeface="Calibri" pitchFamily="34" charset="0"/>
+                <a:ea typeface="Calibri" pitchFamily="34" charset="-122"/>
+                <a:cs typeface="Calibri" pitchFamily="34" charset="-120"/>
+              </a:rPr>
+              <a:t>agent-one config explain → chaque valeur, son fichier et sa ligne</a:t>
             </a:r>
             <a:endParaRPr lang="en-US" sz="1300" dirty="0"/>
           </a:p>
@@ -15146,6 +14506,1588 @@
                 <a:cs typeface="Calibri" pitchFamily="34" charset="-120"/>
               </a:rPr>
               <a:t>22</a:t>
+            </a:r>
+            <a:endParaRPr lang="en-US" sz="900" dirty="0"/>
+          </a:p>
+        </p:txBody>
+      </p:sp>
+      <p:sp>
+        <p:nvSpPr>
+          <p:cNvPr id="5" name="Text 2"/>
+          <p:cNvSpPr txBox="1"/>
+          <p:nvPr/>
+        </p:nvSpPr>
+        <p:spPr>
+          <a:xfrm>
+            <a:off x="548640" y="320040"/>
+            <a:ext cx="10972800" cy="274320"/>
+          </a:xfrm>
+          <a:prstGeom prst="rect">
+            <a:avLst/>
+          </a:prstGeom>
+          <a:noFill/>
+          <a:ln/>
+        </p:spPr>
+        <p:txBody>
+          <a:bodyPr wrap="square" lIns="0" tIns="0" rIns="0" bIns="0" rtlCol="0" anchor="ctr"/>
+          <a:lstStyle/>
+          <a:p>
+            <a:pPr indent="0" marL="0">
+              <a:buNone/>
+            </a:pPr>
+            <a:r>
+              <a:rPr lang="en-US" sz="1100" b="1" spc="200" kern="0" dirty="0">
+                <a:solidFill>
+                  <a:srgbClr val="2BA3C7"/>
+                </a:solidFill>
+                <a:latin typeface="Calibri" pitchFamily="34" charset="0"/>
+                <a:ea typeface="Calibri" pitchFamily="34" charset="-122"/>
+                <a:cs typeface="Calibri" pitchFamily="34" charset="-120"/>
+              </a:rPr>
+              <a:t>DÉMO</a:t>
+            </a:r>
+            <a:endParaRPr lang="en-US" sz="1100" dirty="0"/>
+          </a:p>
+        </p:txBody>
+      </p:sp>
+      <p:sp>
+        <p:nvSpPr>
+          <p:cNvPr id="6" name="Text 3"/>
+          <p:cNvSpPr txBox="1"/>
+          <p:nvPr/>
+        </p:nvSpPr>
+        <p:spPr>
+          <a:xfrm>
+            <a:off x="548640" y="594360"/>
+            <a:ext cx="11064240" cy="731520"/>
+          </a:xfrm>
+          <a:prstGeom prst="rect">
+            <a:avLst/>
+          </a:prstGeom>
+          <a:noFill/>
+          <a:ln/>
+        </p:spPr>
+        <p:txBody>
+          <a:bodyPr wrap="square" lIns="0" tIns="0" rIns="0" bIns="0" rtlCol="0" anchor="ctr"/>
+          <a:lstStyle/>
+          <a:p>
+            <a:pPr indent="0" marL="0">
+              <a:buNone/>
+            </a:pPr>
+            <a:r>
+              <a:rPr lang="en-US" sz="3400" b="1" dirty="0">
+                <a:solidFill>
+                  <a:srgbClr val="EEF3F9"/>
+                </a:solidFill>
+                <a:latin typeface="Cambria" pitchFamily="34" charset="0"/>
+                <a:ea typeface="Cambria" pitchFamily="34" charset="-122"/>
+                <a:cs typeface="Cambria" pitchFamily="34" charset="-120"/>
+              </a:rPr>
+              <a:t>En direct, sur nos modèles vLLM</a:t>
+            </a:r>
+            <a:endParaRPr lang="en-US" sz="3400" dirty="0"/>
+          </a:p>
+        </p:txBody>
+      </p:sp>
+      <p:sp>
+        <p:nvSpPr>
+          <p:cNvPr id="7" name="Shape 4"/>
+          <p:cNvSpPr/>
+          <p:nvPr/>
+        </p:nvSpPr>
+        <p:spPr>
+          <a:xfrm>
+            <a:off x="548640" y="1645920"/>
+            <a:ext cx="2103120" cy="1188720"/>
+          </a:xfrm>
+          <a:prstGeom prst="roundRect">
+            <a:avLst>
+              <a:gd name="adj" fmla="val 9231"/>
+            </a:avLst>
+          </a:prstGeom>
+          <a:solidFill>
+            <a:srgbClr val="13263B"/>
+          </a:solidFill>
+          <a:ln w="12700">
+            <a:solidFill>
+              <a:srgbClr val="13263B"/>
+            </a:solidFill>
+            <a:prstDash val="solid"/>
+          </a:ln>
+        </p:spPr>
+      </p:sp>
+      <p:sp>
+        <p:nvSpPr>
+          <p:cNvPr id="8" name="Text 5"/>
+          <p:cNvSpPr txBox="1"/>
+          <p:nvPr/>
+        </p:nvSpPr>
+        <p:spPr>
+          <a:xfrm>
+            <a:off x="777240" y="1810512"/>
+            <a:ext cx="1691640" cy="457200"/>
+          </a:xfrm>
+          <a:prstGeom prst="rect">
+            <a:avLst/>
+          </a:prstGeom>
+          <a:noFill/>
+          <a:ln/>
+        </p:spPr>
+        <p:txBody>
+          <a:bodyPr wrap="square" lIns="0" tIns="0" rIns="0" bIns="0" rtlCol="0" anchor="ctr"/>
+          <a:lstStyle/>
+          <a:p>
+            <a:pPr indent="0" marL="0">
+              <a:buNone/>
+            </a:pPr>
+            <a:r>
+              <a:rPr lang="en-US" sz="1700" b="1" dirty="0">
+                <a:solidFill>
+                  <a:srgbClr val="2BA3C7"/>
+                </a:solidFill>
+                <a:latin typeface="Calibri" pitchFamily="34" charset="0"/>
+                <a:ea typeface="Calibri" pitchFamily="34" charset="-122"/>
+                <a:cs typeface="Calibri" pitchFamily="34" charset="-120"/>
+              </a:rPr>
+              <a:t>Agent-One</a:t>
+            </a:r>
+            <a:endParaRPr lang="en-US" sz="1700" dirty="0"/>
+          </a:p>
+        </p:txBody>
+      </p:sp>
+      <p:sp>
+        <p:nvSpPr>
+          <p:cNvPr id="9" name="Shape 6"/>
+          <p:cNvSpPr/>
+          <p:nvPr/>
+        </p:nvSpPr>
+        <p:spPr>
+          <a:xfrm>
+            <a:off x="2743200" y="2240280"/>
+            <a:ext cx="548640" cy="0"/>
+          </a:xfrm>
+          <a:prstGeom prst="line">
+            <a:avLst/>
+          </a:prstGeom>
+          <a:noFill/>
+          <a:ln w="25400">
+            <a:solidFill>
+              <a:srgbClr val="8FA3B8"/>
+            </a:solidFill>
+            <a:prstDash val="solid"/>
+            <a:tailEnd type="triangle"/>
+          </a:ln>
+        </p:spPr>
+      </p:sp>
+      <p:sp>
+        <p:nvSpPr>
+          <p:cNvPr id="10" name="Shape 7"/>
+          <p:cNvSpPr/>
+          <p:nvPr/>
+        </p:nvSpPr>
+        <p:spPr>
+          <a:xfrm>
+            <a:off x="3383280" y="1645920"/>
+            <a:ext cx="2103120" cy="1188720"/>
+          </a:xfrm>
+          <a:prstGeom prst="roundRect">
+            <a:avLst>
+              <a:gd name="adj" fmla="val 9231"/>
+            </a:avLst>
+          </a:prstGeom>
+          <a:solidFill>
+            <a:srgbClr val="13263B"/>
+          </a:solidFill>
+          <a:ln w="12700">
+            <a:solidFill>
+              <a:srgbClr val="13263B"/>
+            </a:solidFill>
+            <a:prstDash val="solid"/>
+          </a:ln>
+        </p:spPr>
+      </p:sp>
+      <p:sp>
+        <p:nvSpPr>
+          <p:cNvPr id="11" name="Text 8"/>
+          <p:cNvSpPr txBox="1"/>
+          <p:nvPr/>
+        </p:nvSpPr>
+        <p:spPr>
+          <a:xfrm>
+            <a:off x="3611880" y="1810512"/>
+            <a:ext cx="1691640" cy="457200"/>
+          </a:xfrm>
+          <a:prstGeom prst="rect">
+            <a:avLst/>
+          </a:prstGeom>
+          <a:noFill/>
+          <a:ln/>
+        </p:spPr>
+        <p:txBody>
+          <a:bodyPr wrap="square" lIns="0" tIns="0" rIns="0" bIns="0" rtlCol="0" anchor="ctr"/>
+          <a:lstStyle/>
+          <a:p>
+            <a:pPr indent="0" marL="0">
+              <a:buNone/>
+            </a:pPr>
+            <a:r>
+              <a:rPr lang="en-US" sz="1700" b="1" dirty="0">
+                <a:solidFill>
+                  <a:srgbClr val="D4AF37"/>
+                </a:solidFill>
+                <a:latin typeface="Calibri" pitchFamily="34" charset="0"/>
+                <a:ea typeface="Calibri" pitchFamily="34" charset="-122"/>
+                <a:cs typeface="Calibri" pitchFamily="34" charset="-120"/>
+              </a:rPr>
+              <a:t>Gateway</a:t>
+            </a:r>
+            <a:endParaRPr lang="en-US" sz="1700" dirty="0"/>
+          </a:p>
+        </p:txBody>
+      </p:sp>
+      <p:sp>
+        <p:nvSpPr>
+          <p:cNvPr id="12" name="Shape 9"/>
+          <p:cNvSpPr/>
+          <p:nvPr/>
+        </p:nvSpPr>
+        <p:spPr>
+          <a:xfrm>
+            <a:off x="5577840" y="2240280"/>
+            <a:ext cx="548640" cy="0"/>
+          </a:xfrm>
+          <a:prstGeom prst="line">
+            <a:avLst/>
+          </a:prstGeom>
+          <a:noFill/>
+          <a:ln w="25400">
+            <a:solidFill>
+              <a:srgbClr val="8FA3B8"/>
+            </a:solidFill>
+            <a:prstDash val="solid"/>
+            <a:tailEnd type="triangle"/>
+          </a:ln>
+        </p:spPr>
+      </p:sp>
+      <p:sp>
+        <p:nvSpPr>
+          <p:cNvPr id="13" name="Text 10"/>
+          <p:cNvSpPr txBox="1"/>
+          <p:nvPr/>
+        </p:nvSpPr>
+        <p:spPr>
+          <a:xfrm>
+            <a:off x="6217920" y="1417320"/>
+            <a:ext cx="1828800" cy="274320"/>
+          </a:xfrm>
+          <a:prstGeom prst="rect">
+            <a:avLst/>
+          </a:prstGeom>
+          <a:noFill/>
+          <a:ln/>
+        </p:spPr>
+        <p:txBody>
+          <a:bodyPr wrap="square" lIns="0" tIns="0" rIns="0" bIns="0" rtlCol="0" anchor="ctr"/>
+          <a:lstStyle/>
+          <a:p>
+            <a:pPr indent="0" marL="0">
+              <a:buNone/>
+            </a:pPr>
+            <a:r>
+              <a:rPr lang="en-US" sz="1200" b="1" dirty="0">
+                <a:solidFill>
+                  <a:srgbClr val="8FA3B8"/>
+                </a:solidFill>
+                <a:latin typeface="Calibri" pitchFamily="34" charset="0"/>
+                <a:ea typeface="Calibri" pitchFamily="34" charset="-122"/>
+                <a:cs typeface="Calibri" pitchFamily="34" charset="-120"/>
+              </a:rPr>
+              <a:t>vLLM</a:t>
+            </a:r>
+            <a:endParaRPr lang="en-US" sz="1200" dirty="0"/>
+          </a:p>
+        </p:txBody>
+      </p:sp>
+      <p:sp>
+        <p:nvSpPr>
+          <p:cNvPr id="14" name="Shape 11"/>
+          <p:cNvSpPr/>
+          <p:nvPr/>
+        </p:nvSpPr>
+        <p:spPr>
+          <a:xfrm>
+            <a:off x="6217920" y="1737360"/>
+            <a:ext cx="1737360" cy="1051560"/>
+          </a:xfrm>
+          <a:prstGeom prst="roundRect">
+            <a:avLst>
+              <a:gd name="adj" fmla="val 8696"/>
+            </a:avLst>
+          </a:prstGeom>
+          <a:solidFill>
+            <a:srgbClr val="13263B"/>
+          </a:solidFill>
+          <a:ln w="19050">
+            <a:solidFill>
+              <a:srgbClr val="8E72E6"/>
+            </a:solidFill>
+            <a:prstDash val="solid"/>
+          </a:ln>
+        </p:spPr>
+      </p:sp>
+      <p:sp>
+        <p:nvSpPr>
+          <p:cNvPr id="15" name="Text 12"/>
+          <p:cNvSpPr txBox="1"/>
+          <p:nvPr/>
+        </p:nvSpPr>
+        <p:spPr>
+          <a:xfrm>
+            <a:off x="6217920" y="1783080"/>
+            <a:ext cx="1737360" cy="457200"/>
+          </a:xfrm>
+          <a:prstGeom prst="rect">
+            <a:avLst/>
+          </a:prstGeom>
+          <a:noFill/>
+          <a:ln/>
+        </p:spPr>
+        <p:txBody>
+          <a:bodyPr wrap="square" lIns="0" tIns="0" rIns="0" bIns="0" rtlCol="0" anchor="ctr"/>
+          <a:lstStyle/>
+          <a:p>
+            <a:pPr algn="ctr" indent="0" marL="0">
+              <a:buNone/>
+            </a:pPr>
+            <a:r>
+              <a:rPr lang="en-US" sz="1200" b="1" dirty="0">
+                <a:solidFill>
+                  <a:srgbClr val="EEF3F9"/>
+                </a:solidFill>
+                <a:latin typeface="Courier New" pitchFamily="34" charset="0"/>
+                <a:ea typeface="Courier New" pitchFamily="34" charset="-122"/>
+                <a:cs typeface="Courier New" pitchFamily="34" charset="-120"/>
+              </a:rPr>
+              <a:t>muse-glimmer</a:t>
+            </a:r>
+            <a:endParaRPr lang="en-US" sz="1200" dirty="0"/>
+          </a:p>
+        </p:txBody>
+      </p:sp>
+      <p:sp>
+        <p:nvSpPr>
+          <p:cNvPr id="16" name="Text 13"/>
+          <p:cNvSpPr txBox="1"/>
+          <p:nvPr/>
+        </p:nvSpPr>
+        <p:spPr>
+          <a:xfrm>
+            <a:off x="6217920" y="2240280"/>
+            <a:ext cx="1737360" cy="457200"/>
+          </a:xfrm>
+          <a:prstGeom prst="rect">
+            <a:avLst/>
+          </a:prstGeom>
+          <a:noFill/>
+          <a:ln/>
+        </p:spPr>
+        <p:txBody>
+          <a:bodyPr wrap="square" lIns="0" tIns="0" rIns="0" bIns="0" rtlCol="0" anchor="ctr"/>
+          <a:lstStyle/>
+          <a:p>
+            <a:pPr algn="ctr" indent="0" marL="0">
+              <a:buNone/>
+            </a:pPr>
+            <a:r>
+              <a:rPr lang="en-US" sz="1100" dirty="0">
+                <a:solidFill>
+                  <a:srgbClr val="8FA3B8"/>
+                </a:solidFill>
+                <a:latin typeface="Calibri" pitchFamily="34" charset="0"/>
+                <a:ea typeface="Calibri" pitchFamily="34" charset="-122"/>
+                <a:cs typeface="Calibri" pitchFamily="34" charset="-120"/>
+              </a:rPr>
+              <a:t>analyste · lit</a:t>
+            </a:r>
+            <a:endParaRPr lang="en-US" sz="1100" dirty="0"/>
+          </a:p>
+        </p:txBody>
+      </p:sp>
+      <p:sp>
+        <p:nvSpPr>
+          <p:cNvPr id="17" name="Shape 14"/>
+          <p:cNvSpPr/>
+          <p:nvPr/>
+        </p:nvSpPr>
+        <p:spPr>
+          <a:xfrm>
+            <a:off x="8046720" y="1737360"/>
+            <a:ext cx="1737360" cy="1051560"/>
+          </a:xfrm>
+          <a:prstGeom prst="roundRect">
+            <a:avLst>
+              <a:gd name="adj" fmla="val 8696"/>
+            </a:avLst>
+          </a:prstGeom>
+          <a:solidFill>
+            <a:srgbClr val="13263B"/>
+          </a:solidFill>
+          <a:ln w="19050">
+            <a:solidFill>
+              <a:srgbClr val="8E72E6"/>
+            </a:solidFill>
+            <a:prstDash val="solid"/>
+          </a:ln>
+        </p:spPr>
+      </p:sp>
+      <p:sp>
+        <p:nvSpPr>
+          <p:cNvPr id="18" name="Text 15"/>
+          <p:cNvSpPr txBox="1"/>
+          <p:nvPr/>
+        </p:nvSpPr>
+        <p:spPr>
+          <a:xfrm>
+            <a:off x="8046720" y="1783080"/>
+            <a:ext cx="1737360" cy="457200"/>
+          </a:xfrm>
+          <a:prstGeom prst="rect">
+            <a:avLst/>
+          </a:prstGeom>
+          <a:noFill/>
+          <a:ln/>
+        </p:spPr>
+        <p:txBody>
+          <a:bodyPr wrap="square" lIns="0" tIns="0" rIns="0" bIns="0" rtlCol="0" anchor="ctr"/>
+          <a:lstStyle/>
+          <a:p>
+            <a:pPr algn="ctr" indent="0" marL="0">
+              <a:buNone/>
+            </a:pPr>
+            <a:r>
+              <a:rPr lang="en-US" sz="1200" b="1" dirty="0">
+                <a:solidFill>
+                  <a:srgbClr val="EEF3F9"/>
+                </a:solidFill>
+                <a:latin typeface="Courier New" pitchFamily="34" charset="0"/>
+                <a:ea typeface="Courier New" pitchFamily="34" charset="-122"/>
+                <a:cs typeface="Courier New" pitchFamily="34" charset="-120"/>
+              </a:rPr>
+              <a:t>glm-5-3</a:t>
+            </a:r>
+            <a:endParaRPr lang="en-US" sz="1200" dirty="0"/>
+          </a:p>
+        </p:txBody>
+      </p:sp>
+      <p:sp>
+        <p:nvSpPr>
+          <p:cNvPr id="19" name="Text 16"/>
+          <p:cNvSpPr txBox="1"/>
+          <p:nvPr/>
+        </p:nvSpPr>
+        <p:spPr>
+          <a:xfrm>
+            <a:off x="8046720" y="2240280"/>
+            <a:ext cx="1737360" cy="457200"/>
+          </a:xfrm>
+          <a:prstGeom prst="rect">
+            <a:avLst/>
+          </a:prstGeom>
+          <a:noFill/>
+          <a:ln/>
+        </p:spPr>
+        <p:txBody>
+          <a:bodyPr wrap="square" lIns="0" tIns="0" rIns="0" bIns="0" rtlCol="0" anchor="ctr"/>
+          <a:lstStyle/>
+          <a:p>
+            <a:pPr algn="ctr" indent="0" marL="0">
+              <a:buNone/>
+            </a:pPr>
+            <a:r>
+              <a:rPr lang="en-US" sz="1100" dirty="0">
+                <a:solidFill>
+                  <a:srgbClr val="8FA3B8"/>
+                </a:solidFill>
+                <a:latin typeface="Calibri" pitchFamily="34" charset="0"/>
+                <a:ea typeface="Calibri" pitchFamily="34" charset="-122"/>
+                <a:cs typeface="Calibri" pitchFamily="34" charset="-120"/>
+              </a:rPr>
+              <a:t>juge · valide</a:t>
+            </a:r>
+            <a:endParaRPr lang="en-US" sz="1100" dirty="0"/>
+          </a:p>
+        </p:txBody>
+      </p:sp>
+      <p:sp>
+        <p:nvSpPr>
+          <p:cNvPr id="20" name="Shape 17"/>
+          <p:cNvSpPr/>
+          <p:nvPr/>
+        </p:nvSpPr>
+        <p:spPr>
+          <a:xfrm>
+            <a:off x="9875520" y="1737360"/>
+            <a:ext cx="1737360" cy="1051560"/>
+          </a:xfrm>
+          <a:prstGeom prst="roundRect">
+            <a:avLst>
+              <a:gd name="adj" fmla="val 8696"/>
+            </a:avLst>
+          </a:prstGeom>
+          <a:solidFill>
+            <a:srgbClr val="13263B"/>
+          </a:solidFill>
+          <a:ln w="19050">
+            <a:solidFill>
+              <a:srgbClr val="8E72E6"/>
+            </a:solidFill>
+            <a:prstDash val="solid"/>
+          </a:ln>
+        </p:spPr>
+      </p:sp>
+      <p:sp>
+        <p:nvSpPr>
+          <p:cNvPr id="21" name="Text 18"/>
+          <p:cNvSpPr txBox="1"/>
+          <p:nvPr/>
+        </p:nvSpPr>
+        <p:spPr>
+          <a:xfrm>
+            <a:off x="9875520" y="1783080"/>
+            <a:ext cx="1737360" cy="457200"/>
+          </a:xfrm>
+          <a:prstGeom prst="rect">
+            <a:avLst/>
+          </a:prstGeom>
+          <a:noFill/>
+          <a:ln/>
+        </p:spPr>
+        <p:txBody>
+          <a:bodyPr wrap="square" lIns="0" tIns="0" rIns="0" bIns="0" rtlCol="0" anchor="ctr"/>
+          <a:lstStyle/>
+          <a:p>
+            <a:pPr algn="ctr" indent="0" marL="0">
+              <a:buNone/>
+            </a:pPr>
+            <a:r>
+              <a:rPr lang="en-US" sz="1200" b="1" dirty="0">
+                <a:solidFill>
+                  <a:srgbClr val="EEF3F9"/>
+                </a:solidFill>
+                <a:latin typeface="Courier New" pitchFamily="34" charset="0"/>
+                <a:ea typeface="Courier New" pitchFamily="34" charset="-122"/>
+                <a:cs typeface="Courier New" pitchFamily="34" charset="-120"/>
+              </a:rPr>
+              <a:t>kimi-k3</a:t>
+            </a:r>
+            <a:endParaRPr lang="en-US" sz="1200" dirty="0"/>
+          </a:p>
+        </p:txBody>
+      </p:sp>
+      <p:sp>
+        <p:nvSpPr>
+          <p:cNvPr id="22" name="Text 19"/>
+          <p:cNvSpPr txBox="1"/>
+          <p:nvPr/>
+        </p:nvSpPr>
+        <p:spPr>
+          <a:xfrm>
+            <a:off x="9875520" y="2240280"/>
+            <a:ext cx="1737360" cy="457200"/>
+          </a:xfrm>
+          <a:prstGeom prst="rect">
+            <a:avLst/>
+          </a:prstGeom>
+          <a:noFill/>
+          <a:ln/>
+        </p:spPr>
+        <p:txBody>
+          <a:bodyPr wrap="square" lIns="0" tIns="0" rIns="0" bIns="0" rtlCol="0" anchor="ctr"/>
+          <a:lstStyle/>
+          <a:p>
+            <a:pPr algn="ctr" indent="0" marL="0">
+              <a:buNone/>
+            </a:pPr>
+            <a:r>
+              <a:rPr lang="en-US" sz="1100" dirty="0">
+                <a:solidFill>
+                  <a:srgbClr val="8FA3B8"/>
+                </a:solidFill>
+                <a:latin typeface="Calibri" pitchFamily="34" charset="0"/>
+                <a:ea typeface="Calibri" pitchFamily="34" charset="-122"/>
+                <a:cs typeface="Calibri" pitchFamily="34" charset="-120"/>
+              </a:rPr>
+              <a:t>rédacteur · session</a:t>
+            </a:r>
+            <a:endParaRPr lang="en-US" sz="1100" dirty="0"/>
+          </a:p>
+        </p:txBody>
+      </p:sp>
+      <p:sp>
+        <p:nvSpPr>
+          <p:cNvPr id="23" name="Shape 20"/>
+          <p:cNvSpPr/>
+          <p:nvPr/>
+        </p:nvSpPr>
+        <p:spPr>
+          <a:xfrm>
+            <a:off x="548640" y="3246120"/>
+            <a:ext cx="2121408" cy="2697480"/>
+          </a:xfrm>
+          <a:prstGeom prst="roundRect">
+            <a:avLst>
+              <a:gd name="adj" fmla="val 5172"/>
+            </a:avLst>
+          </a:prstGeom>
+          <a:solidFill>
+            <a:srgbClr val="13263B"/>
+          </a:solidFill>
+          <a:ln w="12700">
+            <a:solidFill>
+              <a:srgbClr val="13263B"/>
+            </a:solidFill>
+            <a:prstDash val="solid"/>
+          </a:ln>
+        </p:spPr>
+      </p:sp>
+      <p:sp>
+        <p:nvSpPr>
+          <p:cNvPr id="24" name="Shape 21"/>
+          <p:cNvSpPr/>
+          <p:nvPr/>
+        </p:nvSpPr>
+        <p:spPr>
+          <a:xfrm>
+            <a:off x="731520" y="3429000"/>
+            <a:ext cx="411480" cy="411480"/>
+          </a:xfrm>
+          <a:prstGeom prst="ellipse">
+            <a:avLst/>
+          </a:prstGeom>
+          <a:solidFill>
+            <a:srgbClr val="2BA3C7"/>
+          </a:solidFill>
+          <a:ln w="12700">
+            <a:solidFill>
+              <a:srgbClr val="2BA3C7"/>
+            </a:solidFill>
+            <a:prstDash val="solid"/>
+          </a:ln>
+        </p:spPr>
+      </p:sp>
+      <p:sp>
+        <p:nvSpPr>
+          <p:cNvPr id="25" name="Text 22"/>
+          <p:cNvSpPr txBox="1"/>
+          <p:nvPr/>
+        </p:nvSpPr>
+        <p:spPr>
+          <a:xfrm>
+            <a:off x="731520" y="3429000"/>
+            <a:ext cx="411480" cy="411480"/>
+          </a:xfrm>
+          <a:prstGeom prst="rect">
+            <a:avLst/>
+          </a:prstGeom>
+          <a:noFill/>
+          <a:ln/>
+        </p:spPr>
+        <p:txBody>
+          <a:bodyPr wrap="square" lIns="0" tIns="0" rIns="0" bIns="0" rtlCol="0" anchor="ctr"/>
+          <a:lstStyle/>
+          <a:p>
+            <a:pPr algn="ctr" indent="0" marL="0">
+              <a:buNone/>
+            </a:pPr>
+            <a:r>
+              <a:rPr lang="en-US" sz="1500" b="1" dirty="0">
+                <a:solidFill>
+                  <a:srgbClr val="0B1A2B"/>
+                </a:solidFill>
+                <a:latin typeface="Cambria" pitchFamily="34" charset="0"/>
+                <a:ea typeface="Cambria" pitchFamily="34" charset="-122"/>
+                <a:cs typeface="Cambria" pitchFamily="34" charset="-120"/>
+              </a:rPr>
+              <a:t>1</a:t>
+            </a:r>
+            <a:endParaRPr lang="en-US" sz="1500" dirty="0"/>
+          </a:p>
+        </p:txBody>
+      </p:sp>
+      <p:sp>
+        <p:nvSpPr>
+          <p:cNvPr id="26" name="Text 23"/>
+          <p:cNvSpPr txBox="1"/>
+          <p:nvPr/>
+        </p:nvSpPr>
+        <p:spPr>
+          <a:xfrm>
+            <a:off x="1280160" y="3410712"/>
+            <a:ext cx="1207008" cy="457200"/>
+          </a:xfrm>
+          <a:prstGeom prst="rect">
+            <a:avLst/>
+          </a:prstGeom>
+          <a:noFill/>
+          <a:ln/>
+        </p:spPr>
+        <p:txBody>
+          <a:bodyPr wrap="square" lIns="0" tIns="0" rIns="0" bIns="0" rtlCol="0" anchor="ctr"/>
+          <a:lstStyle/>
+          <a:p>
+            <a:pPr indent="0" marL="0">
+              <a:buNone/>
+            </a:pPr>
+            <a:r>
+              <a:rPr lang="en-US" sz="1500" b="1" dirty="0">
+                <a:solidFill>
+                  <a:srgbClr val="2BA3C7"/>
+                </a:solidFill>
+                <a:latin typeface="Calibri" pitchFamily="34" charset="0"/>
+                <a:ea typeface="Calibri" pitchFamily="34" charset="-122"/>
+                <a:cs typeface="Calibri" pitchFamily="34" charset="-120"/>
+              </a:rPr>
+              <a:t>status</a:t>
+            </a:r>
+            <a:endParaRPr lang="en-US" sz="1500" dirty="0"/>
+          </a:p>
+        </p:txBody>
+      </p:sp>
+      <p:sp>
+        <p:nvSpPr>
+          <p:cNvPr id="27" name="Text 24"/>
+          <p:cNvSpPr txBox="1"/>
+          <p:nvPr/>
+        </p:nvSpPr>
+        <p:spPr>
+          <a:xfrm>
+            <a:off x="777240" y="3931920"/>
+            <a:ext cx="1664208" cy="1874520"/>
+          </a:xfrm>
+          <a:prstGeom prst="rect">
+            <a:avLst/>
+          </a:prstGeom>
+          <a:noFill/>
+          <a:ln/>
+        </p:spPr>
+        <p:txBody>
+          <a:bodyPr wrap="square" lIns="0" tIns="0" rIns="0" bIns="0" rtlCol="0" anchor="t"/>
+          <a:lstStyle/>
+          <a:p>
+            <a:pPr indent="0" marL="0">
+              <a:spcAft>
+                <a:spcPts val="400"/>
+              </a:spcAft>
+              <a:buNone/>
+            </a:pPr>
+            <a:r>
+              <a:rPr lang="en-US" sz="1300" dirty="0">
+                <a:solidFill>
+                  <a:srgbClr val="EEF3F9"/>
+                </a:solidFill>
+                <a:latin typeface="Calibri" pitchFamily="34" charset="0"/>
+                <a:ea typeface="Calibri" pitchFamily="34" charset="-122"/>
+                <a:cs typeface="Calibri" pitchFamily="34" charset="-120"/>
+              </a:rPr>
+              <a:t>chaque modèle résolu, avec son fichier</a:t>
+            </a:r>
+            <a:endParaRPr lang="en-US" sz="1300" dirty="0"/>
+          </a:p>
+        </p:txBody>
+      </p:sp>
+      <p:sp>
+        <p:nvSpPr>
+          <p:cNvPr id="28" name="Shape 25"/>
+          <p:cNvSpPr/>
+          <p:nvPr/>
+        </p:nvSpPr>
+        <p:spPr>
+          <a:xfrm>
+            <a:off x="2807208" y="3246120"/>
+            <a:ext cx="2121408" cy="2697480"/>
+          </a:xfrm>
+          <a:prstGeom prst="roundRect">
+            <a:avLst>
+              <a:gd name="adj" fmla="val 5172"/>
+            </a:avLst>
+          </a:prstGeom>
+          <a:solidFill>
+            <a:srgbClr val="13263B"/>
+          </a:solidFill>
+          <a:ln w="12700">
+            <a:solidFill>
+              <a:srgbClr val="13263B"/>
+            </a:solidFill>
+            <a:prstDash val="solid"/>
+          </a:ln>
+        </p:spPr>
+      </p:sp>
+      <p:sp>
+        <p:nvSpPr>
+          <p:cNvPr id="29" name="Shape 26"/>
+          <p:cNvSpPr/>
+          <p:nvPr/>
+        </p:nvSpPr>
+        <p:spPr>
+          <a:xfrm>
+            <a:off x="2990088" y="3429000"/>
+            <a:ext cx="411480" cy="411480"/>
+          </a:xfrm>
+          <a:prstGeom prst="ellipse">
+            <a:avLst/>
+          </a:prstGeom>
+          <a:solidFill>
+            <a:srgbClr val="5FBF7A"/>
+          </a:solidFill>
+          <a:ln w="12700">
+            <a:solidFill>
+              <a:srgbClr val="5FBF7A"/>
+            </a:solidFill>
+            <a:prstDash val="solid"/>
+          </a:ln>
+        </p:spPr>
+      </p:sp>
+      <p:sp>
+        <p:nvSpPr>
+          <p:cNvPr id="30" name="Text 27"/>
+          <p:cNvSpPr txBox="1"/>
+          <p:nvPr/>
+        </p:nvSpPr>
+        <p:spPr>
+          <a:xfrm>
+            <a:off x="2990088" y="3429000"/>
+            <a:ext cx="411480" cy="411480"/>
+          </a:xfrm>
+          <a:prstGeom prst="rect">
+            <a:avLst/>
+          </a:prstGeom>
+          <a:noFill/>
+          <a:ln/>
+        </p:spPr>
+        <p:txBody>
+          <a:bodyPr wrap="square" lIns="0" tIns="0" rIns="0" bIns="0" rtlCol="0" anchor="ctr"/>
+          <a:lstStyle/>
+          <a:p>
+            <a:pPr algn="ctr" indent="0" marL="0">
+              <a:buNone/>
+            </a:pPr>
+            <a:r>
+              <a:rPr lang="en-US" sz="1500" b="1" dirty="0">
+                <a:solidFill>
+                  <a:srgbClr val="0B1A2B"/>
+                </a:solidFill>
+                <a:latin typeface="Cambria" pitchFamily="34" charset="0"/>
+                <a:ea typeface="Cambria" pitchFamily="34" charset="-122"/>
+                <a:cs typeface="Cambria" pitchFamily="34" charset="-120"/>
+              </a:rPr>
+              <a:t>2</a:t>
+            </a:r>
+            <a:endParaRPr lang="en-US" sz="1500" dirty="0"/>
+          </a:p>
+        </p:txBody>
+      </p:sp>
+      <p:sp>
+        <p:nvSpPr>
+          <p:cNvPr id="31" name="Text 28"/>
+          <p:cNvSpPr txBox="1"/>
+          <p:nvPr/>
+        </p:nvSpPr>
+        <p:spPr>
+          <a:xfrm>
+            <a:off x="3538728" y="3410712"/>
+            <a:ext cx="1207008" cy="457200"/>
+          </a:xfrm>
+          <a:prstGeom prst="rect">
+            <a:avLst/>
+          </a:prstGeom>
+          <a:noFill/>
+          <a:ln/>
+        </p:spPr>
+        <p:txBody>
+          <a:bodyPr wrap="square" lIns="0" tIns="0" rIns="0" bIns="0" rtlCol="0" anchor="ctr"/>
+          <a:lstStyle/>
+          <a:p>
+            <a:pPr indent="0" marL="0">
+              <a:buNone/>
+            </a:pPr>
+            <a:r>
+              <a:rPr lang="en-US" sz="1500" b="1" dirty="0">
+                <a:solidFill>
+                  <a:srgbClr val="5FBF7A"/>
+                </a:solidFill>
+                <a:latin typeface="Calibri" pitchFamily="34" charset="0"/>
+                <a:ea typeface="Calibri" pitchFamily="34" charset="-122"/>
+                <a:cs typeface="Calibri" pitchFamily="34" charset="-120"/>
+              </a:rPr>
+              <a:t>Une vraie tâche</a:t>
+            </a:r>
+            <a:endParaRPr lang="en-US" sz="1500" dirty="0"/>
+          </a:p>
+        </p:txBody>
+      </p:sp>
+      <p:sp>
+        <p:nvSpPr>
+          <p:cNvPr id="32" name="Text 29"/>
+          <p:cNvSpPr txBox="1"/>
+          <p:nvPr/>
+        </p:nvSpPr>
+        <p:spPr>
+          <a:xfrm>
+            <a:off x="3035808" y="3931920"/>
+            <a:ext cx="1664208" cy="1874520"/>
+          </a:xfrm>
+          <a:prstGeom prst="rect">
+            <a:avLst/>
+          </a:prstGeom>
+          <a:noFill/>
+          <a:ln/>
+        </p:spPr>
+        <p:txBody>
+          <a:bodyPr wrap="square" lIns="0" tIns="0" rIns="0" bIns="0" rtlCol="0" anchor="t"/>
+          <a:lstStyle/>
+          <a:p>
+            <a:pPr indent="0" marL="0">
+              <a:spcAft>
+                <a:spcPts val="400"/>
+              </a:spcAft>
+              <a:buNone/>
+            </a:pPr>
+            <a:r>
+              <a:rPr lang="en-US" sz="1300" dirty="0">
+                <a:solidFill>
+                  <a:srgbClr val="EEF3F9"/>
+                </a:solidFill>
+                <a:latin typeface="Calibri" pitchFamily="34" charset="0"/>
+                <a:ea typeface="Calibri" pitchFamily="34" charset="-122"/>
+                <a:cs typeface="Calibri" pitchFamily="34" charset="-120"/>
+              </a:rPr>
+              <a:t>la réflexion en direct ; outils en cartes ; diffs</a:t>
+            </a:r>
+            <a:endParaRPr lang="en-US" sz="1300" dirty="0"/>
+          </a:p>
+        </p:txBody>
+      </p:sp>
+      <p:sp>
+        <p:nvSpPr>
+          <p:cNvPr id="33" name="Shape 30"/>
+          <p:cNvSpPr/>
+          <p:nvPr/>
+        </p:nvSpPr>
+        <p:spPr>
+          <a:xfrm>
+            <a:off x="5065776" y="3246120"/>
+            <a:ext cx="2121408" cy="2697480"/>
+          </a:xfrm>
+          <a:prstGeom prst="roundRect">
+            <a:avLst>
+              <a:gd name="adj" fmla="val 5172"/>
+            </a:avLst>
+          </a:prstGeom>
+          <a:solidFill>
+            <a:srgbClr val="13263B"/>
+          </a:solidFill>
+          <a:ln w="12700">
+            <a:solidFill>
+              <a:srgbClr val="13263B"/>
+            </a:solidFill>
+            <a:prstDash val="solid"/>
+          </a:ln>
+        </p:spPr>
+      </p:sp>
+      <p:sp>
+        <p:nvSpPr>
+          <p:cNvPr id="34" name="Shape 31"/>
+          <p:cNvSpPr/>
+          <p:nvPr/>
+        </p:nvSpPr>
+        <p:spPr>
+          <a:xfrm>
+            <a:off x="5248656" y="3429000"/>
+            <a:ext cx="411480" cy="411480"/>
+          </a:xfrm>
+          <a:prstGeom prst="ellipse">
+            <a:avLst/>
+          </a:prstGeom>
+          <a:solidFill>
+            <a:srgbClr val="8E72E6"/>
+          </a:solidFill>
+          <a:ln w="12700">
+            <a:solidFill>
+              <a:srgbClr val="8E72E6"/>
+            </a:solidFill>
+            <a:prstDash val="solid"/>
+          </a:ln>
+        </p:spPr>
+      </p:sp>
+      <p:sp>
+        <p:nvSpPr>
+          <p:cNvPr id="35" name="Text 32"/>
+          <p:cNvSpPr txBox="1"/>
+          <p:nvPr/>
+        </p:nvSpPr>
+        <p:spPr>
+          <a:xfrm>
+            <a:off x="5248656" y="3429000"/>
+            <a:ext cx="411480" cy="411480"/>
+          </a:xfrm>
+          <a:prstGeom prst="rect">
+            <a:avLst/>
+          </a:prstGeom>
+          <a:noFill/>
+          <a:ln/>
+        </p:spPr>
+        <p:txBody>
+          <a:bodyPr wrap="square" lIns="0" tIns="0" rIns="0" bIns="0" rtlCol="0" anchor="ctr"/>
+          <a:lstStyle/>
+          <a:p>
+            <a:pPr algn="ctr" indent="0" marL="0">
+              <a:buNone/>
+            </a:pPr>
+            <a:r>
+              <a:rPr lang="en-US" sz="1500" b="1" dirty="0">
+                <a:solidFill>
+                  <a:srgbClr val="0B1A2B"/>
+                </a:solidFill>
+                <a:latin typeface="Cambria" pitchFamily="34" charset="0"/>
+                <a:ea typeface="Cambria" pitchFamily="34" charset="-122"/>
+                <a:cs typeface="Cambria" pitchFamily="34" charset="-120"/>
+              </a:rPr>
+              <a:t>3</a:t>
+            </a:r>
+            <a:endParaRPr lang="en-US" sz="1500" dirty="0"/>
+          </a:p>
+        </p:txBody>
+      </p:sp>
+      <p:sp>
+        <p:nvSpPr>
+          <p:cNvPr id="36" name="Text 33"/>
+          <p:cNvSpPr txBox="1"/>
+          <p:nvPr/>
+        </p:nvSpPr>
+        <p:spPr>
+          <a:xfrm>
+            <a:off x="5797296" y="3410712"/>
+            <a:ext cx="1207008" cy="457200"/>
+          </a:xfrm>
+          <a:prstGeom prst="rect">
+            <a:avLst/>
+          </a:prstGeom>
+          <a:noFill/>
+          <a:ln/>
+        </p:spPr>
+        <p:txBody>
+          <a:bodyPr wrap="square" lIns="0" tIns="0" rIns="0" bIns="0" rtlCol="0" anchor="ctr"/>
+          <a:lstStyle/>
+          <a:p>
+            <a:pPr indent="0" marL="0">
+              <a:buNone/>
+            </a:pPr>
+            <a:r>
+              <a:rPr lang="en-US" sz="1500" b="1" dirty="0">
+                <a:solidFill>
+                  <a:srgbClr val="8E72E6"/>
+                </a:solidFill>
+                <a:latin typeface="Calibri" pitchFamily="34" charset="0"/>
+                <a:ea typeface="Calibri" pitchFamily="34" charset="-122"/>
+                <a:cs typeface="Calibri" pitchFamily="34" charset="-120"/>
+              </a:rPr>
+              <a:t>Un sous-agent</a:t>
+            </a:r>
+            <a:endParaRPr lang="en-US" sz="1500" dirty="0"/>
+          </a:p>
+        </p:txBody>
+      </p:sp>
+      <p:sp>
+        <p:nvSpPr>
+          <p:cNvPr id="37" name="Text 34"/>
+          <p:cNvSpPr txBox="1"/>
+          <p:nvPr/>
+        </p:nvSpPr>
+        <p:spPr>
+          <a:xfrm>
+            <a:off x="5294376" y="3931920"/>
+            <a:ext cx="1664208" cy="1874520"/>
+          </a:xfrm>
+          <a:prstGeom prst="rect">
+            <a:avLst/>
+          </a:prstGeom>
+          <a:noFill/>
+          <a:ln/>
+        </p:spPr>
+        <p:txBody>
+          <a:bodyPr wrap="square" lIns="0" tIns="0" rIns="0" bIns="0" rtlCol="0" anchor="t"/>
+          <a:lstStyle/>
+          <a:p>
+            <a:pPr indent="0" marL="0">
+              <a:spcAft>
+                <a:spcPts val="400"/>
+              </a:spcAft>
+              <a:buNone/>
+            </a:pPr>
+            <a:r>
+              <a:rPr lang="en-US" sz="1300" dirty="0">
+                <a:solidFill>
+                  <a:srgbClr val="EEF3F9"/>
+                </a:solidFill>
+                <a:latin typeface="Calibri" pitchFamily="34" charset="0"/>
+                <a:ea typeface="Calibri" pitchFamily="34" charset="-122"/>
+                <a:cs typeface="Calibri" pitchFamily="34" charset="-120"/>
+              </a:rPr>
+              <a:t>ctrl+t — le suivre</a:t>
+            </a:r>
+            <a:endParaRPr lang="en-US" sz="1300" dirty="0"/>
+          </a:p>
+        </p:txBody>
+      </p:sp>
+      <p:sp>
+        <p:nvSpPr>
+          <p:cNvPr id="38" name="Shape 35"/>
+          <p:cNvSpPr/>
+          <p:nvPr/>
+        </p:nvSpPr>
+        <p:spPr>
+          <a:xfrm>
+            <a:off x="7324344" y="3246120"/>
+            <a:ext cx="2121408" cy="2697480"/>
+          </a:xfrm>
+          <a:prstGeom prst="roundRect">
+            <a:avLst>
+              <a:gd name="adj" fmla="val 5172"/>
+            </a:avLst>
+          </a:prstGeom>
+          <a:solidFill>
+            <a:srgbClr val="13263B"/>
+          </a:solidFill>
+          <a:ln w="12700">
+            <a:solidFill>
+              <a:srgbClr val="13263B"/>
+            </a:solidFill>
+            <a:prstDash val="solid"/>
+          </a:ln>
+        </p:spPr>
+      </p:sp>
+      <p:sp>
+        <p:nvSpPr>
+          <p:cNvPr id="39" name="Shape 36"/>
+          <p:cNvSpPr/>
+          <p:nvPr/>
+        </p:nvSpPr>
+        <p:spPr>
+          <a:xfrm>
+            <a:off x="7507224" y="3429000"/>
+            <a:ext cx="411480" cy="411480"/>
+          </a:xfrm>
+          <a:prstGeom prst="ellipse">
+            <a:avLst/>
+          </a:prstGeom>
+          <a:solidFill>
+            <a:srgbClr val="D4AF37"/>
+          </a:solidFill>
+          <a:ln w="12700">
+            <a:solidFill>
+              <a:srgbClr val="D4AF37"/>
+            </a:solidFill>
+            <a:prstDash val="solid"/>
+          </a:ln>
+        </p:spPr>
+      </p:sp>
+      <p:sp>
+        <p:nvSpPr>
+          <p:cNvPr id="40" name="Text 37"/>
+          <p:cNvSpPr txBox="1"/>
+          <p:nvPr/>
+        </p:nvSpPr>
+        <p:spPr>
+          <a:xfrm>
+            <a:off x="7507224" y="3429000"/>
+            <a:ext cx="411480" cy="411480"/>
+          </a:xfrm>
+          <a:prstGeom prst="rect">
+            <a:avLst/>
+          </a:prstGeom>
+          <a:noFill/>
+          <a:ln/>
+        </p:spPr>
+        <p:txBody>
+          <a:bodyPr wrap="square" lIns="0" tIns="0" rIns="0" bIns="0" rtlCol="0" anchor="ctr"/>
+          <a:lstStyle/>
+          <a:p>
+            <a:pPr algn="ctr" indent="0" marL="0">
+              <a:buNone/>
+            </a:pPr>
+            <a:r>
+              <a:rPr lang="en-US" sz="1500" b="1" dirty="0">
+                <a:solidFill>
+                  <a:srgbClr val="0B1A2B"/>
+                </a:solidFill>
+                <a:latin typeface="Cambria" pitchFamily="34" charset="0"/>
+                <a:ea typeface="Cambria" pitchFamily="34" charset="-122"/>
+                <a:cs typeface="Cambria" pitchFamily="34" charset="-120"/>
+              </a:rPr>
+              <a:t>4</a:t>
+            </a:r>
+            <a:endParaRPr lang="en-US" sz="1500" dirty="0"/>
+          </a:p>
+        </p:txBody>
+      </p:sp>
+      <p:sp>
+        <p:nvSpPr>
+          <p:cNvPr id="41" name="Text 38"/>
+          <p:cNvSpPr txBox="1"/>
+          <p:nvPr/>
+        </p:nvSpPr>
+        <p:spPr>
+          <a:xfrm>
+            <a:off x="8055864" y="3410712"/>
+            <a:ext cx="1207008" cy="457200"/>
+          </a:xfrm>
+          <a:prstGeom prst="rect">
+            <a:avLst/>
+          </a:prstGeom>
+          <a:noFill/>
+          <a:ln/>
+        </p:spPr>
+        <p:txBody>
+          <a:bodyPr wrap="square" lIns="0" tIns="0" rIns="0" bIns="0" rtlCol="0" anchor="ctr"/>
+          <a:lstStyle/>
+          <a:p>
+            <a:pPr indent="0" marL="0">
+              <a:buNone/>
+            </a:pPr>
+            <a:r>
+              <a:rPr lang="en-US" sz="1500" b="1" dirty="0">
+                <a:solidFill>
+                  <a:srgbClr val="D4AF37"/>
+                </a:solidFill>
+                <a:latin typeface="Calibri" pitchFamily="34" charset="0"/>
+                <a:ea typeface="Calibri" pitchFamily="34" charset="-122"/>
+                <a:cs typeface="Calibri" pitchFamily="34" charset="-120"/>
+              </a:rPr>
+              <a:t>La validation</a:t>
+            </a:r>
+            <a:endParaRPr lang="en-US" sz="1500" dirty="0"/>
+          </a:p>
+        </p:txBody>
+      </p:sp>
+      <p:sp>
+        <p:nvSpPr>
+          <p:cNvPr id="42" name="Text 39"/>
+          <p:cNvSpPr txBox="1"/>
+          <p:nvPr/>
+        </p:nvSpPr>
+        <p:spPr>
+          <a:xfrm>
+            <a:off x="7552944" y="3931920"/>
+            <a:ext cx="1664208" cy="1874520"/>
+          </a:xfrm>
+          <a:prstGeom prst="rect">
+            <a:avLst/>
+          </a:prstGeom>
+          <a:noFill/>
+          <a:ln/>
+        </p:spPr>
+        <p:txBody>
+          <a:bodyPr wrap="square" lIns="0" tIns="0" rIns="0" bIns="0" rtlCol="0" anchor="t"/>
+          <a:lstStyle/>
+          <a:p>
+            <a:pPr indent="0" marL="0">
+              <a:spcAft>
+                <a:spcPts val="400"/>
+              </a:spcAft>
+              <a:buNone/>
+            </a:pPr>
+            <a:r>
+              <a:rPr lang="en-US" sz="1300" dirty="0">
+                <a:solidFill>
+                  <a:srgbClr val="EEF3F9"/>
+                </a:solidFill>
+                <a:latin typeface="Calibri" pitchFamily="34" charset="0"/>
+                <a:ea typeface="Calibri" pitchFamily="34" charset="-122"/>
+                <a:cs typeface="Calibri" pitchFamily="34" charset="-120"/>
+              </a:rPr>
+              <a:t>le verdict du propriétaire, consigné</a:t>
+            </a:r>
+            <a:endParaRPr lang="en-US" sz="1300" dirty="0"/>
+          </a:p>
+        </p:txBody>
+      </p:sp>
+      <p:sp>
+        <p:nvSpPr>
+          <p:cNvPr id="43" name="Shape 40"/>
+          <p:cNvSpPr/>
+          <p:nvPr/>
+        </p:nvSpPr>
+        <p:spPr>
+          <a:xfrm>
+            <a:off x="9582912" y="3246120"/>
+            <a:ext cx="2121408" cy="2697480"/>
+          </a:xfrm>
+          <a:prstGeom prst="roundRect">
+            <a:avLst>
+              <a:gd name="adj" fmla="val 5172"/>
+            </a:avLst>
+          </a:prstGeom>
+          <a:solidFill>
+            <a:srgbClr val="13263B"/>
+          </a:solidFill>
+          <a:ln w="12700">
+            <a:solidFill>
+              <a:srgbClr val="13263B"/>
+            </a:solidFill>
+            <a:prstDash val="solid"/>
+          </a:ln>
+        </p:spPr>
+      </p:sp>
+      <p:sp>
+        <p:nvSpPr>
+          <p:cNvPr id="44" name="Shape 41"/>
+          <p:cNvSpPr/>
+          <p:nvPr/>
+        </p:nvSpPr>
+        <p:spPr>
+          <a:xfrm>
+            <a:off x="9765792" y="3429000"/>
+            <a:ext cx="411480" cy="411480"/>
+          </a:xfrm>
+          <a:prstGeom prst="ellipse">
+            <a:avLst/>
+          </a:prstGeom>
+          <a:solidFill>
+            <a:srgbClr val="E0645A"/>
+          </a:solidFill>
+          <a:ln w="12700">
+            <a:solidFill>
+              <a:srgbClr val="E0645A"/>
+            </a:solidFill>
+            <a:prstDash val="solid"/>
+          </a:ln>
+        </p:spPr>
+      </p:sp>
+      <p:sp>
+        <p:nvSpPr>
+          <p:cNvPr id="45" name="Text 42"/>
+          <p:cNvSpPr txBox="1"/>
+          <p:nvPr/>
+        </p:nvSpPr>
+        <p:spPr>
+          <a:xfrm>
+            <a:off x="9765792" y="3429000"/>
+            <a:ext cx="411480" cy="411480"/>
+          </a:xfrm>
+          <a:prstGeom prst="rect">
+            <a:avLst/>
+          </a:prstGeom>
+          <a:noFill/>
+          <a:ln/>
+        </p:spPr>
+        <p:txBody>
+          <a:bodyPr wrap="square" lIns="0" tIns="0" rIns="0" bIns="0" rtlCol="0" anchor="ctr"/>
+          <a:lstStyle/>
+          <a:p>
+            <a:pPr algn="ctr" indent="0" marL="0">
+              <a:buNone/>
+            </a:pPr>
+            <a:r>
+              <a:rPr lang="en-US" sz="1500" b="1" dirty="0">
+                <a:solidFill>
+                  <a:srgbClr val="0B1A2B"/>
+                </a:solidFill>
+                <a:latin typeface="Cambria" pitchFamily="34" charset="0"/>
+                <a:ea typeface="Cambria" pitchFamily="34" charset="-122"/>
+                <a:cs typeface="Cambria" pitchFamily="34" charset="-120"/>
+              </a:rPr>
+              <a:t>5</a:t>
+            </a:r>
+            <a:endParaRPr lang="en-US" sz="1500" dirty="0"/>
+          </a:p>
+        </p:txBody>
+      </p:sp>
+      <p:sp>
+        <p:nvSpPr>
+          <p:cNvPr id="46" name="Text 43"/>
+          <p:cNvSpPr txBox="1"/>
+          <p:nvPr/>
+        </p:nvSpPr>
+        <p:spPr>
+          <a:xfrm>
+            <a:off x="10314432" y="3410712"/>
+            <a:ext cx="1207008" cy="457200"/>
+          </a:xfrm>
+          <a:prstGeom prst="rect">
+            <a:avLst/>
+          </a:prstGeom>
+          <a:noFill/>
+          <a:ln/>
+        </p:spPr>
+        <p:txBody>
+          <a:bodyPr wrap="square" lIns="0" tIns="0" rIns="0" bIns="0" rtlCol="0" anchor="ctr"/>
+          <a:lstStyle/>
+          <a:p>
+            <a:pPr indent="0" marL="0">
+              <a:buNone/>
+            </a:pPr>
+            <a:r>
+              <a:rPr lang="en-US" sz="1500" b="1" dirty="0">
+                <a:solidFill>
+                  <a:srgbClr val="E0645A"/>
+                </a:solidFill>
+                <a:latin typeface="Calibri" pitchFamily="34" charset="0"/>
+                <a:ea typeface="Calibri" pitchFamily="34" charset="-122"/>
+                <a:cs typeface="Calibri" pitchFamily="34" charset="-120"/>
+              </a:rPr>
+              <a:t>Le guard</a:t>
+            </a:r>
+            <a:endParaRPr lang="en-US" sz="1500" dirty="0"/>
+          </a:p>
+        </p:txBody>
+      </p:sp>
+      <p:sp>
+        <p:nvSpPr>
+          <p:cNvPr id="47" name="Text 44"/>
+          <p:cNvSpPr txBox="1"/>
+          <p:nvPr/>
+        </p:nvSpPr>
+        <p:spPr>
+          <a:xfrm>
+            <a:off x="9811512" y="3931920"/>
+            <a:ext cx="1664208" cy="1874520"/>
+          </a:xfrm>
+          <a:prstGeom prst="rect">
+            <a:avLst/>
+          </a:prstGeom>
+          <a:noFill/>
+          <a:ln/>
+        </p:spPr>
+        <p:txBody>
+          <a:bodyPr wrap="square" lIns="0" tIns="0" rIns="0" bIns="0" rtlCol="0" anchor="t"/>
+          <a:lstStyle/>
+          <a:p>
+            <a:pPr indent="0" marL="0">
+              <a:spcAft>
+                <a:spcPts val="400"/>
+              </a:spcAft>
+              <a:buNone/>
+            </a:pPr>
+            <a:r>
+              <a:rPr lang="en-US" sz="1300" dirty="0">
+                <a:solidFill>
+                  <a:srgbClr val="EEF3F9"/>
+                </a:solidFill>
+                <a:latin typeface="Calibri" pitchFamily="34" charset="0"/>
+                <a:ea typeface="Calibri" pitchFamily="34" charset="-122"/>
+                <a:cs typeface="Calibri" pitchFamily="34" charset="-120"/>
+              </a:rPr>
+              <a:t>« supprime ~ » — refusé avant toute question</a:t>
+            </a:r>
+            <a:endParaRPr lang="en-US" sz="1300" dirty="0"/>
+          </a:p>
+        </p:txBody>
+      </p:sp>
+    </p:spTree>
+  </p:cSld>
+  <p:clrMapOvr>
+    <a:masterClrMapping/>
+  </p:clrMapOvr>
+</p:sld>
+</file>
+
+<file path=ppt/slides/slide23.xml><?xml version="1.0" encoding="utf-8"?>
+<p:sld xmlns:a="http://schemas.openxmlformats.org/drawingml/2006/main" xmlns:r="http://schemas.openxmlformats.org/officeDocument/2006/relationships" xmlns:p="http://schemas.openxmlformats.org/presentationml/2006/main">
+  <p:cSld name="Slide 23">
+    <p:bg>
+      <p:bgPr>
+        <a:solidFill>
+          <a:srgbClr val="0B1A2B"/>
+        </a:solidFill>
+      </p:bgPr>
+    </p:bg>
+    <p:spTree>
+      <p:nvGrpSpPr>
+        <p:cNvPr id="1" name=""/>
+        <p:cNvGrpSpPr/>
+        <p:nvPr/>
+      </p:nvGrpSpPr>
+      <p:grpSpPr>
+        <a:xfrm>
+          <a:off x="0" y="0"/>
+          <a:ext cx="0" cy="0"/>
+          <a:chOff x="0" y="0"/>
+          <a:chExt cx="0" cy="0"/>
+        </a:xfrm>
+      </p:grpSpPr>
+      <p:sp>
+        <p:nvSpPr>
+          <p:cNvPr id="2" name="Text 0"/>
+          <p:cNvSpPr txBox="1"/>
+          <p:nvPr/>
+        </p:nvSpPr>
+        <p:spPr>
+          <a:xfrm>
+            <a:off x="457200" y="6473952"/>
+            <a:ext cx="7315200" cy="274320"/>
+          </a:xfrm>
+          <a:prstGeom prst="rect">
+            <a:avLst/>
+          </a:prstGeom>
+          <a:noFill/>
+          <a:ln/>
+        </p:spPr>
+        <p:txBody>
+          <a:bodyPr wrap="square" lIns="0" tIns="0" rIns="0" bIns="0" rtlCol="0" anchor="ctr"/>
+          <a:lstStyle/>
+          <a:p>
+            <a:pPr indent="0" marL="0">
+              <a:buNone/>
+            </a:pPr>
+            <a:r>
+              <a:rPr lang="en-US" sz="900" spc="100" kern="0" dirty="0">
+                <a:solidFill>
+                  <a:srgbClr val="8FA3B8"/>
+                </a:solidFill>
+                <a:latin typeface="Calibri" pitchFamily="34" charset="0"/>
+                <a:ea typeface="Calibri" pitchFamily="34" charset="-122"/>
+                <a:cs typeface="Calibri" pitchFamily="34" charset="-120"/>
+              </a:rPr>
+              <a:t>AGENT-ONE ⋄ DU LLM AU HARNESS</a:t>
+            </a:r>
+            <a:endParaRPr lang="en-US" sz="900" dirty="0"/>
+          </a:p>
+        </p:txBody>
+      </p:sp>
+      <p:sp>
+        <p:nvSpPr>
+          <p:cNvPr id="3" name="Text 1"/>
+          <p:cNvSpPr txBox="1"/>
+          <p:nvPr/>
+        </p:nvSpPr>
+        <p:spPr>
+          <a:xfrm>
+            <a:off x="11274552" y="6473952"/>
+            <a:ext cx="457200" cy="274320"/>
+          </a:xfrm>
+          <a:prstGeom prst="rect">
+            <a:avLst/>
+          </a:prstGeom>
+          <a:noFill/>
+          <a:ln/>
+        </p:spPr>
+        <p:txBody>
+          <a:bodyPr wrap="square" lIns="0" tIns="0" rIns="0" bIns="0" rtlCol="0" anchor="ctr"/>
+          <a:lstStyle/>
+          <a:p>
+            <a:pPr algn="r" indent="0" marL="0">
+              <a:buNone/>
+            </a:pPr>
+            <a:r>
+              <a:rPr lang="en-US" sz="900" dirty="0">
+                <a:solidFill>
+                  <a:srgbClr val="8FA3B8"/>
+                </a:solidFill>
+                <a:latin typeface="Calibri" pitchFamily="34" charset="0"/>
+                <a:ea typeface="Calibri" pitchFamily="34" charset="-122"/>
+                <a:cs typeface="Calibri" pitchFamily="34" charset="-120"/>
+              </a:rPr>
+              <a:t>23</a:t>
             </a:r>
             <a:endParaRPr lang="en-US" sz="900" dirty="0"/>
           </a:p>
